--- a/documentacion/Presentation1.pptx
+++ b/documentacion/Presentation1.pptx
@@ -5,10 +5,12 @@
     <p:sldMasterId id="2147483648" r:id="rId1"/>
   </p:sldMasterIdLst>
   <p:sldIdLst>
-    <p:sldId id="256" r:id="rId2"/>
-    <p:sldId id="257" r:id="rId3"/>
-    <p:sldId id="258" r:id="rId4"/>
-    <p:sldId id="259" r:id="rId5"/>
+    <p:sldId id="260" r:id="rId2"/>
+    <p:sldId id="261" r:id="rId3"/>
+    <p:sldId id="256" r:id="rId4"/>
+    <p:sldId id="257" r:id="rId5"/>
+    <p:sldId id="258" r:id="rId6"/>
+    <p:sldId id="259" r:id="rId7"/>
   </p:sldIdLst>
   <p:sldSz cx="12192000" cy="6858000"/>
   <p:notesSz cx="6858000" cy="9144000"/>
@@ -264,7 +266,7 @@
           <a:p>
             <a:fld id="{B618AE5B-63BA-49CE-99EF-D9342E6857D2}" type="datetimeFigureOut">
               <a:rPr lang="es-MX" smtClean="0"/>
-              <a:t>12/11/2025</a:t>
+              <a:t>26/11/2025</a:t>
             </a:fld>
             <a:endParaRPr lang="es-MX"/>
           </a:p>
@@ -464,7 +466,7 @@
           <a:p>
             <a:fld id="{B618AE5B-63BA-49CE-99EF-D9342E6857D2}" type="datetimeFigureOut">
               <a:rPr lang="es-MX" smtClean="0"/>
-              <a:t>12/11/2025</a:t>
+              <a:t>26/11/2025</a:t>
             </a:fld>
             <a:endParaRPr lang="es-MX"/>
           </a:p>
@@ -674,7 +676,7 @@
           <a:p>
             <a:fld id="{B618AE5B-63BA-49CE-99EF-D9342E6857D2}" type="datetimeFigureOut">
               <a:rPr lang="es-MX" smtClean="0"/>
-              <a:t>12/11/2025</a:t>
+              <a:t>26/11/2025</a:t>
             </a:fld>
             <a:endParaRPr lang="es-MX"/>
           </a:p>
@@ -874,7 +876,7 @@
           <a:p>
             <a:fld id="{B618AE5B-63BA-49CE-99EF-D9342E6857D2}" type="datetimeFigureOut">
               <a:rPr lang="es-MX" smtClean="0"/>
-              <a:t>12/11/2025</a:t>
+              <a:t>26/11/2025</a:t>
             </a:fld>
             <a:endParaRPr lang="es-MX"/>
           </a:p>
@@ -1150,7 +1152,7 @@
           <a:p>
             <a:fld id="{B618AE5B-63BA-49CE-99EF-D9342E6857D2}" type="datetimeFigureOut">
               <a:rPr lang="es-MX" smtClean="0"/>
-              <a:t>12/11/2025</a:t>
+              <a:t>26/11/2025</a:t>
             </a:fld>
             <a:endParaRPr lang="es-MX"/>
           </a:p>
@@ -1418,7 +1420,7 @@
           <a:p>
             <a:fld id="{B618AE5B-63BA-49CE-99EF-D9342E6857D2}" type="datetimeFigureOut">
               <a:rPr lang="es-MX" smtClean="0"/>
-              <a:t>12/11/2025</a:t>
+              <a:t>26/11/2025</a:t>
             </a:fld>
             <a:endParaRPr lang="es-MX"/>
           </a:p>
@@ -1833,7 +1835,7 @@
           <a:p>
             <a:fld id="{B618AE5B-63BA-49CE-99EF-D9342E6857D2}" type="datetimeFigureOut">
               <a:rPr lang="es-MX" smtClean="0"/>
-              <a:t>12/11/2025</a:t>
+              <a:t>26/11/2025</a:t>
             </a:fld>
             <a:endParaRPr lang="es-MX"/>
           </a:p>
@@ -1975,7 +1977,7 @@
           <a:p>
             <a:fld id="{B618AE5B-63BA-49CE-99EF-D9342E6857D2}" type="datetimeFigureOut">
               <a:rPr lang="es-MX" smtClean="0"/>
-              <a:t>12/11/2025</a:t>
+              <a:t>26/11/2025</a:t>
             </a:fld>
             <a:endParaRPr lang="es-MX"/>
           </a:p>
@@ -2088,7 +2090,7 @@
           <a:p>
             <a:fld id="{B618AE5B-63BA-49CE-99EF-D9342E6857D2}" type="datetimeFigureOut">
               <a:rPr lang="es-MX" smtClean="0"/>
-              <a:t>12/11/2025</a:t>
+              <a:t>26/11/2025</a:t>
             </a:fld>
             <a:endParaRPr lang="es-MX"/>
           </a:p>
@@ -2401,7 +2403,7 @@
           <a:p>
             <a:fld id="{B618AE5B-63BA-49CE-99EF-D9342E6857D2}" type="datetimeFigureOut">
               <a:rPr lang="es-MX" smtClean="0"/>
-              <a:t>12/11/2025</a:t>
+              <a:t>26/11/2025</a:t>
             </a:fld>
             <a:endParaRPr lang="es-MX"/>
           </a:p>
@@ -2690,7 +2692,7 @@
           <a:p>
             <a:fld id="{B618AE5B-63BA-49CE-99EF-D9342E6857D2}" type="datetimeFigureOut">
               <a:rPr lang="es-MX" smtClean="0"/>
-              <a:t>12/11/2025</a:t>
+              <a:t>26/11/2025</a:t>
             </a:fld>
             <a:endParaRPr lang="es-MX"/>
           </a:p>
@@ -2933,7 +2935,7 @@
           <a:p>
             <a:fld id="{B618AE5B-63BA-49CE-99EF-D9342E6857D2}" type="datetimeFigureOut">
               <a:rPr lang="es-MX" smtClean="0"/>
-              <a:t>12/11/2025</a:t>
+              <a:t>26/11/2025</a:t>
             </a:fld>
             <a:endParaRPr lang="es-MX"/>
           </a:p>
@@ -3350,6 +3352,72 @@
           <a:chExt cx="0" cy="0"/>
         </a:xfrm>
       </p:grpSpPr>
+    </p:spTree>
+    <p:extLst>
+      <p:ext uri="{BB962C8B-B14F-4D97-AF65-F5344CB8AC3E}">
+        <p14:creationId xmlns:p14="http://schemas.microsoft.com/office/powerpoint/2010/main" val="2417236368"/>
+      </p:ext>
+    </p:extLst>
+  </p:cSld>
+  <p:clrMapOvr>
+    <a:masterClrMapping/>
+  </p:clrMapOvr>
+</p:sld>
+</file>
+
+<file path=ppt/slides/slide2.xml><?xml version="1.0" encoding="utf-8"?>
+<p:sld xmlns:a="http://schemas.openxmlformats.org/drawingml/2006/main" xmlns:r="http://schemas.openxmlformats.org/officeDocument/2006/relationships" xmlns:p="http://schemas.openxmlformats.org/presentationml/2006/main">
+  <p:cSld>
+    <p:spTree>
+      <p:nvGrpSpPr>
+        <p:cNvPr id="1" name="">
+          <a:extLst>
+            <a:ext uri="{FF2B5EF4-FFF2-40B4-BE49-F238E27FC236}">
+              <a16:creationId xmlns:a16="http://schemas.microsoft.com/office/drawing/2014/main" id="{70CB2267-382D-7F65-DCE2-786037F196E6}"/>
+            </a:ext>
+          </a:extLst>
+        </p:cNvPr>
+        <p:cNvGrpSpPr/>
+        <p:nvPr/>
+      </p:nvGrpSpPr>
+      <p:grpSpPr>
+        <a:xfrm>
+          <a:off x="0" y="0"/>
+          <a:ext cx="0" cy="0"/>
+          <a:chOff x="0" y="0"/>
+          <a:chExt cx="0" cy="0"/>
+        </a:xfrm>
+      </p:grpSpPr>
+    </p:spTree>
+    <p:extLst>
+      <p:ext uri="{BB962C8B-B14F-4D97-AF65-F5344CB8AC3E}">
+        <p14:creationId xmlns:p14="http://schemas.microsoft.com/office/powerpoint/2010/main" val="1007135045"/>
+      </p:ext>
+    </p:extLst>
+  </p:cSld>
+  <p:clrMapOvr>
+    <a:masterClrMapping/>
+  </p:clrMapOvr>
+</p:sld>
+</file>
+
+<file path=ppt/slides/slide3.xml><?xml version="1.0" encoding="utf-8"?>
+<p:sld xmlns:a="http://schemas.openxmlformats.org/drawingml/2006/main" xmlns:r="http://schemas.openxmlformats.org/officeDocument/2006/relationships" xmlns:p="http://schemas.openxmlformats.org/presentationml/2006/main">
+  <p:cSld>
+    <p:spTree>
+      <p:nvGrpSpPr>
+        <p:cNvPr id="1" name=""/>
+        <p:cNvGrpSpPr/>
+        <p:nvPr/>
+      </p:nvGrpSpPr>
+      <p:grpSpPr>
+        <a:xfrm>
+          <a:off x="0" y="0"/>
+          <a:ext cx="0" cy="0"/>
+          <a:chOff x="0" y="0"/>
+          <a:chExt cx="0" cy="0"/>
+        </a:xfrm>
+      </p:grpSpPr>
       <mc:AlternateContent xmlns:mc="http://schemas.openxmlformats.org/markup-compatibility/2006">
         <mc:Choice xmlns:am3d="http://schemas.microsoft.com/office/drawing/2017/model3d" Requires="am3d">
           <p:graphicFrame>
@@ -3533,7 +3601,7 @@
 </p:sld>
 </file>
 
-<file path=ppt/slides/slide2.xml><?xml version="1.0" encoding="utf-8"?>
+<file path=ppt/slides/slide4.xml><?xml version="1.0" encoding="utf-8"?>
 <p:sld xmlns:a="http://schemas.openxmlformats.org/drawingml/2006/main" xmlns:r="http://schemas.openxmlformats.org/officeDocument/2006/relationships" xmlns:p="http://schemas.openxmlformats.org/presentationml/2006/main">
   <p:cSld>
     <p:spTree>
@@ -3690,13 +3758,13 @@
   <p:clrMapOvr>
     <a:masterClrMapping/>
   </p:clrMapOvr>
-  <mc:AlternateContent xmlns:mc="http://schemas.openxmlformats.org/markup-compatibility/2006">
-    <mc:Choice xmlns:p159="http://schemas.microsoft.com/office/powerpoint/2015/09/main" Requires="p159">
+  <mc:AlternateContent xmlns:mc="http://schemas.openxmlformats.org/markup-compatibility/2006" xmlns:p159="http://schemas.microsoft.com/office/powerpoint/2015/09/main">
+    <mc:Choice Requires="p159">
       <p:transition xmlns:p14="http://schemas.microsoft.com/office/powerpoint/2010/main" spd="slow" p14:dur="2000">
         <p159:morph option="byObject"/>
       </p:transition>
     </mc:Choice>
-    <mc:Fallback>
+    <mc:Fallback xmlns="">
       <p:transition spd="slow">
         <p:fade/>
       </p:transition>
@@ -3705,7 +3773,7 @@
 </p:sld>
 </file>
 
-<file path=ppt/slides/slide3.xml><?xml version="1.0" encoding="utf-8"?>
+<file path=ppt/slides/slide5.xml><?xml version="1.0" encoding="utf-8"?>
 <p:sld xmlns:a="http://schemas.openxmlformats.org/drawingml/2006/main" xmlns:r="http://schemas.openxmlformats.org/officeDocument/2006/relationships" xmlns:p="http://schemas.openxmlformats.org/presentationml/2006/main">
   <p:cSld>
     <p:spTree>
@@ -3986,13 +4054,13 @@
   <p:clrMapOvr>
     <a:masterClrMapping/>
   </p:clrMapOvr>
-  <mc:AlternateContent xmlns:mc="http://schemas.openxmlformats.org/markup-compatibility/2006">
-    <mc:Choice xmlns:p159="http://schemas.microsoft.com/office/powerpoint/2015/09/main" Requires="p159">
+  <mc:AlternateContent xmlns:mc="http://schemas.openxmlformats.org/markup-compatibility/2006" xmlns:p159="http://schemas.microsoft.com/office/powerpoint/2015/09/main">
+    <mc:Choice Requires="p159">
       <p:transition xmlns:p14="http://schemas.microsoft.com/office/powerpoint/2010/main" spd="slow" p14:dur="2000">
         <p159:morph option="byObject"/>
       </p:transition>
     </mc:Choice>
-    <mc:Fallback>
+    <mc:Fallback xmlns="">
       <p:transition spd="slow">
         <p:fade/>
       </p:transition>
@@ -4074,7 +4142,7 @@
 </p:sld>
 </file>
 
-<file path=ppt/slides/slide4.xml><?xml version="1.0" encoding="utf-8"?>
+<file path=ppt/slides/slide6.xml><?xml version="1.0" encoding="utf-8"?>
 <p:sld xmlns:a="http://schemas.openxmlformats.org/drawingml/2006/main" xmlns:r="http://schemas.openxmlformats.org/officeDocument/2006/relationships" xmlns:p="http://schemas.openxmlformats.org/presentationml/2006/main">
   <p:cSld>
     <p:spTree>
@@ -4603,11 +4671,11 @@
   <p:clrMapOvr>
     <a:masterClrMapping/>
   </p:clrMapOvr>
-  <mc:AlternateContent xmlns:mc="http://schemas.openxmlformats.org/markup-compatibility/2006">
-    <mc:Choice xmlns:p14="http://schemas.microsoft.com/office/powerpoint/2010/main" Requires="p14">
+  <mc:AlternateContent xmlns:mc="http://schemas.openxmlformats.org/markup-compatibility/2006" xmlns:p14="http://schemas.microsoft.com/office/powerpoint/2010/main">
+    <mc:Choice Requires="p14">
       <p:transition p14:dur="10"/>
     </mc:Choice>
-    <mc:Fallback>
+    <mc:Fallback xmlns="">
       <p:transition/>
     </mc:Fallback>
   </mc:AlternateContent>

--- a/documentacion/Presentation1.pptx
+++ b/documentacion/Presentation1.pptx
@@ -7,10 +7,6 @@
   <p:sldIdLst>
     <p:sldId id="260" r:id="rId2"/>
     <p:sldId id="261" r:id="rId3"/>
-    <p:sldId id="256" r:id="rId4"/>
-    <p:sldId id="257" r:id="rId5"/>
-    <p:sldId id="258" r:id="rId6"/>
-    <p:sldId id="259" r:id="rId7"/>
   </p:sldIdLst>
   <p:sldSz cx="12192000" cy="6858000"/>
   <p:notesSz cx="6858000" cy="9144000"/>
@@ -266,7 +262,7 @@
           <a:p>
             <a:fld id="{B618AE5B-63BA-49CE-99EF-D9342E6857D2}" type="datetimeFigureOut">
               <a:rPr lang="es-MX" smtClean="0"/>
-              <a:t>26/11/2025</a:t>
+              <a:t>27/11/2025</a:t>
             </a:fld>
             <a:endParaRPr lang="es-MX"/>
           </a:p>
@@ -466,7 +462,7 @@
           <a:p>
             <a:fld id="{B618AE5B-63BA-49CE-99EF-D9342E6857D2}" type="datetimeFigureOut">
               <a:rPr lang="es-MX" smtClean="0"/>
-              <a:t>26/11/2025</a:t>
+              <a:t>27/11/2025</a:t>
             </a:fld>
             <a:endParaRPr lang="es-MX"/>
           </a:p>
@@ -676,7 +672,7 @@
           <a:p>
             <a:fld id="{B618AE5B-63BA-49CE-99EF-D9342E6857D2}" type="datetimeFigureOut">
               <a:rPr lang="es-MX" smtClean="0"/>
-              <a:t>26/11/2025</a:t>
+              <a:t>27/11/2025</a:t>
             </a:fld>
             <a:endParaRPr lang="es-MX"/>
           </a:p>
@@ -876,7 +872,7 @@
           <a:p>
             <a:fld id="{B618AE5B-63BA-49CE-99EF-D9342E6857D2}" type="datetimeFigureOut">
               <a:rPr lang="es-MX" smtClean="0"/>
-              <a:t>26/11/2025</a:t>
+              <a:t>27/11/2025</a:t>
             </a:fld>
             <a:endParaRPr lang="es-MX"/>
           </a:p>
@@ -1152,7 +1148,7 @@
           <a:p>
             <a:fld id="{B618AE5B-63BA-49CE-99EF-D9342E6857D2}" type="datetimeFigureOut">
               <a:rPr lang="es-MX" smtClean="0"/>
-              <a:t>26/11/2025</a:t>
+              <a:t>27/11/2025</a:t>
             </a:fld>
             <a:endParaRPr lang="es-MX"/>
           </a:p>
@@ -1420,7 +1416,7 @@
           <a:p>
             <a:fld id="{B618AE5B-63BA-49CE-99EF-D9342E6857D2}" type="datetimeFigureOut">
               <a:rPr lang="es-MX" smtClean="0"/>
-              <a:t>26/11/2025</a:t>
+              <a:t>27/11/2025</a:t>
             </a:fld>
             <a:endParaRPr lang="es-MX"/>
           </a:p>
@@ -1835,7 +1831,7 @@
           <a:p>
             <a:fld id="{B618AE5B-63BA-49CE-99EF-D9342E6857D2}" type="datetimeFigureOut">
               <a:rPr lang="es-MX" smtClean="0"/>
-              <a:t>26/11/2025</a:t>
+              <a:t>27/11/2025</a:t>
             </a:fld>
             <a:endParaRPr lang="es-MX"/>
           </a:p>
@@ -1977,7 +1973,7 @@
           <a:p>
             <a:fld id="{B618AE5B-63BA-49CE-99EF-D9342E6857D2}" type="datetimeFigureOut">
               <a:rPr lang="es-MX" smtClean="0"/>
-              <a:t>26/11/2025</a:t>
+              <a:t>27/11/2025</a:t>
             </a:fld>
             <a:endParaRPr lang="es-MX"/>
           </a:p>
@@ -2090,7 +2086,7 @@
           <a:p>
             <a:fld id="{B618AE5B-63BA-49CE-99EF-D9342E6857D2}" type="datetimeFigureOut">
               <a:rPr lang="es-MX" smtClean="0"/>
-              <a:t>26/11/2025</a:t>
+              <a:t>27/11/2025</a:t>
             </a:fld>
             <a:endParaRPr lang="es-MX"/>
           </a:p>
@@ -2403,7 +2399,7 @@
           <a:p>
             <a:fld id="{B618AE5B-63BA-49CE-99EF-D9342E6857D2}" type="datetimeFigureOut">
               <a:rPr lang="es-MX" smtClean="0"/>
-              <a:t>26/11/2025</a:t>
+              <a:t>27/11/2025</a:t>
             </a:fld>
             <a:endParaRPr lang="es-MX"/>
           </a:p>
@@ -2692,7 +2688,7 @@
           <a:p>
             <a:fld id="{B618AE5B-63BA-49CE-99EF-D9342E6857D2}" type="datetimeFigureOut">
               <a:rPr lang="es-MX" smtClean="0"/>
-              <a:t>26/11/2025</a:t>
+              <a:t>27/11/2025</a:t>
             </a:fld>
             <a:endParaRPr lang="es-MX"/>
           </a:p>
@@ -2935,7 +2931,7 @@
           <a:p>
             <a:fld id="{B618AE5B-63BA-49CE-99EF-D9342E6857D2}" type="datetimeFigureOut">
               <a:rPr lang="es-MX" smtClean="0"/>
-              <a:t>26/11/2025</a:t>
+              <a:t>27/11/2025</a:t>
             </a:fld>
             <a:endParaRPr lang="es-MX"/>
           </a:p>
@@ -3352,6 +3348,961 @@
           <a:chExt cx="0" cy="0"/>
         </a:xfrm>
       </p:grpSpPr>
+      <p:grpSp>
+        <p:nvGrpSpPr>
+          <p:cNvPr id="30" name="Group 29">
+            <a:extLst>
+              <a:ext uri="{FF2B5EF4-FFF2-40B4-BE49-F238E27FC236}">
+                <a16:creationId xmlns:a16="http://schemas.microsoft.com/office/drawing/2014/main" id="{D97A589B-A3B5-2901-A8E2-C9C7E167B547}"/>
+              </a:ext>
+            </a:extLst>
+          </p:cNvPr>
+          <p:cNvGrpSpPr/>
+          <p:nvPr/>
+        </p:nvGrpSpPr>
+        <p:grpSpPr>
+          <a:xfrm>
+            <a:off x="9312000" y="-1"/>
+            <a:ext cx="2880000" cy="6858000"/>
+            <a:chOff x="9312000" y="-1"/>
+            <a:chExt cx="2880000" cy="6858000"/>
+          </a:xfrm>
+        </p:grpSpPr>
+        <p:sp>
+          <p:nvSpPr>
+            <p:cNvPr id="6" name="Rectangle 5">
+              <a:extLst>
+                <a:ext uri="{FF2B5EF4-FFF2-40B4-BE49-F238E27FC236}">
+                  <a16:creationId xmlns:a16="http://schemas.microsoft.com/office/drawing/2014/main" id="{F309E3C1-F54B-395A-C784-8CEFED071041}"/>
+                </a:ext>
+              </a:extLst>
+            </p:cNvPr>
+            <p:cNvSpPr/>
+            <p:nvPr/>
+          </p:nvSpPr>
+          <p:spPr>
+            <a:xfrm flipH="1">
+              <a:off x="10752000" y="-1"/>
+              <a:ext cx="1440000" cy="6858000"/>
+            </a:xfrm>
+            <a:prstGeom prst="rect">
+              <a:avLst/>
+            </a:prstGeom>
+            <a:solidFill>
+              <a:srgbClr val="1181C3"/>
+            </a:solidFill>
+            <a:ln>
+              <a:noFill/>
+            </a:ln>
+          </p:spPr>
+          <p:style>
+            <a:lnRef idx="2">
+              <a:schemeClr val="accent1">
+                <a:shade val="15000"/>
+              </a:schemeClr>
+            </a:lnRef>
+            <a:fillRef idx="1">
+              <a:schemeClr val="accent1"/>
+            </a:fillRef>
+            <a:effectRef idx="0">
+              <a:schemeClr val="accent1"/>
+            </a:effectRef>
+            <a:fontRef idx="minor">
+              <a:schemeClr val="lt1"/>
+            </a:fontRef>
+          </p:style>
+          <p:txBody>
+            <a:bodyPr rtlCol="0" anchor="ctr"/>
+            <a:lstStyle/>
+            <a:p>
+              <a:pPr algn="ctr"/>
+              <a:endParaRPr lang="es-MX"/>
+            </a:p>
+          </p:txBody>
+        </p:sp>
+        <p:sp>
+          <p:nvSpPr>
+            <p:cNvPr id="19" name="Isosceles Triangle 18">
+              <a:extLst>
+                <a:ext uri="{FF2B5EF4-FFF2-40B4-BE49-F238E27FC236}">
+                  <a16:creationId xmlns:a16="http://schemas.microsoft.com/office/drawing/2014/main" id="{35110857-1D5F-D5CF-7239-A475EB3BD22E}"/>
+                </a:ext>
+              </a:extLst>
+            </p:cNvPr>
+            <p:cNvSpPr/>
+            <p:nvPr/>
+          </p:nvSpPr>
+          <p:spPr>
+            <a:xfrm>
+              <a:off x="9312000" y="3977999"/>
+              <a:ext cx="2880000" cy="2880000"/>
+            </a:xfrm>
+            <a:prstGeom prst="triangle">
+              <a:avLst>
+                <a:gd name="adj" fmla="val 100000"/>
+              </a:avLst>
+            </a:prstGeom>
+            <a:solidFill>
+              <a:srgbClr val="1181C3"/>
+            </a:solidFill>
+            <a:ln>
+              <a:noFill/>
+            </a:ln>
+          </p:spPr>
+          <p:style>
+            <a:lnRef idx="2">
+              <a:schemeClr val="accent1">
+                <a:shade val="15000"/>
+              </a:schemeClr>
+            </a:lnRef>
+            <a:fillRef idx="1">
+              <a:schemeClr val="accent1"/>
+            </a:fillRef>
+            <a:effectRef idx="0">
+              <a:schemeClr val="accent1"/>
+            </a:effectRef>
+            <a:fontRef idx="minor">
+              <a:schemeClr val="lt1"/>
+            </a:fontRef>
+          </p:style>
+          <p:txBody>
+            <a:bodyPr rtlCol="0" anchor="ctr"/>
+            <a:lstStyle/>
+            <a:p>
+              <a:pPr algn="ctr"/>
+              <a:endParaRPr lang="es-MX"/>
+            </a:p>
+          </p:txBody>
+        </p:sp>
+        <p:sp>
+          <p:nvSpPr>
+            <p:cNvPr id="20" name="Isosceles Triangle 19">
+              <a:extLst>
+                <a:ext uri="{FF2B5EF4-FFF2-40B4-BE49-F238E27FC236}">
+                  <a16:creationId xmlns:a16="http://schemas.microsoft.com/office/drawing/2014/main" id="{CC0DA7A5-60D7-5ABF-AAC0-EB2EB9CE9D8D}"/>
+                </a:ext>
+              </a:extLst>
+            </p:cNvPr>
+            <p:cNvSpPr/>
+            <p:nvPr/>
+          </p:nvSpPr>
+          <p:spPr>
+            <a:xfrm flipV="1">
+              <a:off x="9312000" y="-1"/>
+              <a:ext cx="2880000" cy="2880000"/>
+            </a:xfrm>
+            <a:prstGeom prst="triangle">
+              <a:avLst>
+                <a:gd name="adj" fmla="val 100000"/>
+              </a:avLst>
+            </a:prstGeom>
+            <a:solidFill>
+              <a:srgbClr val="1181C3"/>
+            </a:solidFill>
+            <a:ln>
+              <a:noFill/>
+            </a:ln>
+          </p:spPr>
+          <p:style>
+            <a:lnRef idx="2">
+              <a:schemeClr val="accent1">
+                <a:shade val="15000"/>
+              </a:schemeClr>
+            </a:lnRef>
+            <a:fillRef idx="1">
+              <a:schemeClr val="accent1"/>
+            </a:fillRef>
+            <a:effectRef idx="0">
+              <a:schemeClr val="accent1"/>
+            </a:effectRef>
+            <a:fontRef idx="minor">
+              <a:schemeClr val="lt1"/>
+            </a:fontRef>
+          </p:style>
+          <p:txBody>
+            <a:bodyPr rtlCol="0" anchor="ctr"/>
+            <a:lstStyle/>
+            <a:p>
+              <a:pPr algn="ctr"/>
+              <a:endParaRPr lang="es-MX"/>
+            </a:p>
+          </p:txBody>
+        </p:sp>
+      </p:grpSp>
+      <p:grpSp>
+        <p:nvGrpSpPr>
+          <p:cNvPr id="31" name="Group 30">
+            <a:extLst>
+              <a:ext uri="{FF2B5EF4-FFF2-40B4-BE49-F238E27FC236}">
+                <a16:creationId xmlns:a16="http://schemas.microsoft.com/office/drawing/2014/main" id="{3AACE8ED-6D04-04D0-5B97-FE571F989501}"/>
+              </a:ext>
+            </a:extLst>
+          </p:cNvPr>
+          <p:cNvGrpSpPr/>
+          <p:nvPr/>
+        </p:nvGrpSpPr>
+        <p:grpSpPr>
+          <a:xfrm>
+            <a:off x="0" y="-1"/>
+            <a:ext cx="2880000" cy="6858001"/>
+            <a:chOff x="0" y="-1"/>
+            <a:chExt cx="2880000" cy="6858001"/>
+          </a:xfrm>
+        </p:grpSpPr>
+        <p:sp>
+          <p:nvSpPr>
+            <p:cNvPr id="4" name="Rectangle 3">
+              <a:extLst>
+                <a:ext uri="{FF2B5EF4-FFF2-40B4-BE49-F238E27FC236}">
+                  <a16:creationId xmlns:a16="http://schemas.microsoft.com/office/drawing/2014/main" id="{825E376F-60A5-E696-65AB-A4C3E5CA66E4}"/>
+                </a:ext>
+              </a:extLst>
+            </p:cNvPr>
+            <p:cNvSpPr/>
+            <p:nvPr/>
+          </p:nvSpPr>
+          <p:spPr>
+            <a:xfrm>
+              <a:off x="0" y="0"/>
+              <a:ext cx="1440000" cy="6858000"/>
+            </a:xfrm>
+            <a:prstGeom prst="rect">
+              <a:avLst/>
+            </a:prstGeom>
+            <a:solidFill>
+              <a:srgbClr val="ED7237"/>
+            </a:solidFill>
+            <a:ln>
+              <a:noFill/>
+            </a:ln>
+          </p:spPr>
+          <p:style>
+            <a:lnRef idx="2">
+              <a:schemeClr val="accent1">
+                <a:shade val="15000"/>
+              </a:schemeClr>
+            </a:lnRef>
+            <a:fillRef idx="1">
+              <a:schemeClr val="accent1"/>
+            </a:fillRef>
+            <a:effectRef idx="0">
+              <a:schemeClr val="accent1"/>
+            </a:effectRef>
+            <a:fontRef idx="minor">
+              <a:schemeClr val="lt1"/>
+            </a:fontRef>
+          </p:style>
+          <p:txBody>
+            <a:bodyPr rtlCol="0" anchor="ctr"/>
+            <a:lstStyle/>
+            <a:p>
+              <a:pPr algn="ctr"/>
+              <a:endParaRPr lang="es-MX"/>
+            </a:p>
+          </p:txBody>
+        </p:sp>
+        <p:sp>
+          <p:nvSpPr>
+            <p:cNvPr id="21" name="Isosceles Triangle 20">
+              <a:extLst>
+                <a:ext uri="{FF2B5EF4-FFF2-40B4-BE49-F238E27FC236}">
+                  <a16:creationId xmlns:a16="http://schemas.microsoft.com/office/drawing/2014/main" id="{7442344B-8C32-6167-1855-E557D095238E}"/>
+                </a:ext>
+              </a:extLst>
+            </p:cNvPr>
+            <p:cNvSpPr/>
+            <p:nvPr/>
+          </p:nvSpPr>
+          <p:spPr>
+            <a:xfrm flipH="1">
+              <a:off x="0" y="3977999"/>
+              <a:ext cx="2880000" cy="2880000"/>
+            </a:xfrm>
+            <a:prstGeom prst="triangle">
+              <a:avLst>
+                <a:gd name="adj" fmla="val 100000"/>
+              </a:avLst>
+            </a:prstGeom>
+            <a:solidFill>
+              <a:srgbClr val="ED7237"/>
+            </a:solidFill>
+            <a:ln>
+              <a:noFill/>
+            </a:ln>
+          </p:spPr>
+          <p:style>
+            <a:lnRef idx="2">
+              <a:schemeClr val="accent1">
+                <a:shade val="15000"/>
+              </a:schemeClr>
+            </a:lnRef>
+            <a:fillRef idx="1">
+              <a:schemeClr val="accent1"/>
+            </a:fillRef>
+            <a:effectRef idx="0">
+              <a:schemeClr val="accent1"/>
+            </a:effectRef>
+            <a:fontRef idx="minor">
+              <a:schemeClr val="lt1"/>
+            </a:fontRef>
+          </p:style>
+          <p:txBody>
+            <a:bodyPr rtlCol="0" anchor="ctr"/>
+            <a:lstStyle/>
+            <a:p>
+              <a:pPr algn="ctr"/>
+              <a:endParaRPr lang="es-MX"/>
+            </a:p>
+          </p:txBody>
+        </p:sp>
+        <p:sp>
+          <p:nvSpPr>
+            <p:cNvPr id="22" name="Isosceles Triangle 21">
+              <a:extLst>
+                <a:ext uri="{FF2B5EF4-FFF2-40B4-BE49-F238E27FC236}">
+                  <a16:creationId xmlns:a16="http://schemas.microsoft.com/office/drawing/2014/main" id="{385A6783-E802-9CE5-86CD-43F16B7FDE1E}"/>
+                </a:ext>
+              </a:extLst>
+            </p:cNvPr>
+            <p:cNvSpPr/>
+            <p:nvPr/>
+          </p:nvSpPr>
+          <p:spPr>
+            <a:xfrm flipH="1" flipV="1">
+              <a:off x="0" y="-1"/>
+              <a:ext cx="2880000" cy="2880000"/>
+            </a:xfrm>
+            <a:prstGeom prst="triangle">
+              <a:avLst>
+                <a:gd name="adj" fmla="val 100000"/>
+              </a:avLst>
+            </a:prstGeom>
+            <a:solidFill>
+              <a:srgbClr val="ED7237"/>
+            </a:solidFill>
+            <a:ln>
+              <a:noFill/>
+            </a:ln>
+          </p:spPr>
+          <p:style>
+            <a:lnRef idx="2">
+              <a:schemeClr val="accent1">
+                <a:shade val="15000"/>
+              </a:schemeClr>
+            </a:lnRef>
+            <a:fillRef idx="1">
+              <a:schemeClr val="accent1"/>
+            </a:fillRef>
+            <a:effectRef idx="0">
+              <a:schemeClr val="accent1"/>
+            </a:effectRef>
+            <a:fontRef idx="minor">
+              <a:schemeClr val="lt1"/>
+            </a:fontRef>
+          </p:style>
+          <p:txBody>
+            <a:bodyPr rtlCol="0" anchor="ctr"/>
+            <a:lstStyle/>
+            <a:p>
+              <a:pPr algn="ctr"/>
+              <a:endParaRPr lang="es-MX"/>
+            </a:p>
+          </p:txBody>
+        </p:sp>
+      </p:grpSp>
+      <p:grpSp>
+        <p:nvGrpSpPr>
+          <p:cNvPr id="33" name="Group 32">
+            <a:extLst>
+              <a:ext uri="{FF2B5EF4-FFF2-40B4-BE49-F238E27FC236}">
+                <a16:creationId xmlns:a16="http://schemas.microsoft.com/office/drawing/2014/main" id="{A7922323-8040-1C8D-B322-FCBEFA8409AE}"/>
+              </a:ext>
+            </a:extLst>
+          </p:cNvPr>
+          <p:cNvGrpSpPr/>
+          <p:nvPr/>
+        </p:nvGrpSpPr>
+        <p:grpSpPr>
+          <a:xfrm>
+            <a:off x="4447515" y="2178495"/>
+            <a:ext cx="3232445" cy="1403007"/>
+            <a:chOff x="4551229" y="1016179"/>
+            <a:chExt cx="3232445" cy="1403007"/>
+          </a:xfrm>
+        </p:grpSpPr>
+        <p:sp>
+          <p:nvSpPr>
+            <p:cNvPr id="17" name="TextBox 16">
+              <a:extLst>
+                <a:ext uri="{FF2B5EF4-FFF2-40B4-BE49-F238E27FC236}">
+                  <a16:creationId xmlns:a16="http://schemas.microsoft.com/office/drawing/2014/main" id="{3E8DCA09-8808-415D-A77C-B557995F7E11}"/>
+                </a:ext>
+              </a:extLst>
+            </p:cNvPr>
+            <p:cNvSpPr txBox="1"/>
+            <p:nvPr/>
+          </p:nvSpPr>
+          <p:spPr>
+            <a:xfrm>
+              <a:off x="4551229" y="1016179"/>
+              <a:ext cx="1119322" cy="1403007"/>
+            </a:xfrm>
+            <a:custGeom>
+              <a:avLst/>
+              <a:gdLst/>
+              <a:ahLst/>
+              <a:cxnLst/>
+              <a:rect l="l" t="t" r="r" b="b"/>
+              <a:pathLst>
+                <a:path w="1119322" h="1403007">
+                  <a:moveTo>
+                    <a:pt x="0" y="0"/>
+                  </a:moveTo>
+                  <a:lnTo>
+                    <a:pt x="535507" y="0"/>
+                  </a:lnTo>
+                  <a:cubicBezTo>
+                    <a:pt x="698591" y="0"/>
+                    <a:pt x="825016" y="40428"/>
+                    <a:pt x="914781" y="121285"/>
+                  </a:cubicBezTo>
+                  <a:cubicBezTo>
+                    <a:pt x="1014825" y="211736"/>
+                    <a:pt x="1064847" y="326512"/>
+                    <a:pt x="1064847" y="465613"/>
+                  </a:cubicBezTo>
+                  <a:cubicBezTo>
+                    <a:pt x="1064847" y="607456"/>
+                    <a:pt x="1002833" y="727028"/>
+                    <a:pt x="878807" y="824331"/>
+                  </a:cubicBezTo>
+                  <a:lnTo>
+                    <a:pt x="1119322" y="1403007"/>
+                  </a:lnTo>
+                  <a:lnTo>
+                    <a:pt x="681461" y="1403007"/>
+                  </a:lnTo>
+                  <a:lnTo>
+                    <a:pt x="478975" y="950756"/>
+                  </a:lnTo>
+                  <a:lnTo>
+                    <a:pt x="478975" y="589982"/>
+                  </a:lnTo>
+                  <a:lnTo>
+                    <a:pt x="511866" y="589982"/>
+                  </a:lnTo>
+                  <a:cubicBezTo>
+                    <a:pt x="599576" y="589982"/>
+                    <a:pt x="643430" y="552295"/>
+                    <a:pt x="643430" y="476919"/>
+                  </a:cubicBezTo>
+                  <a:cubicBezTo>
+                    <a:pt x="643430" y="410452"/>
+                    <a:pt x="592723" y="377219"/>
+                    <a:pt x="491309" y="377219"/>
+                  </a:cubicBezTo>
+                  <a:lnTo>
+                    <a:pt x="417305" y="377219"/>
+                  </a:lnTo>
+                  <a:lnTo>
+                    <a:pt x="417305" y="1403007"/>
+                  </a:lnTo>
+                  <a:lnTo>
+                    <a:pt x="0" y="1403007"/>
+                  </a:lnTo>
+                  <a:lnTo>
+                    <a:pt x="0" y="0"/>
+                  </a:lnTo>
+                  <a:close/>
+                </a:path>
+              </a:pathLst>
+            </a:custGeom>
+            <a:solidFill>
+              <a:srgbClr val="1181C3"/>
+            </a:solidFill>
+            <a:ln>
+              <a:noFill/>
+            </a:ln>
+            <a:effectLst/>
+          </p:spPr>
+          <p:txBody>
+            <a:bodyPr rot="0" spcFirstLastPara="0" vertOverflow="overflow" horzOverflow="overflow" vert="horz" wrap="square" lIns="91440" tIns="45720" rIns="91440" bIns="45720" numCol="1" spcCol="0" rtlCol="0" fromWordArt="0" anchor="t" anchorCtr="0" forceAA="0" compatLnSpc="1">
+              <a:prstTxWarp prst="textNoShape">
+                <a:avLst/>
+              </a:prstTxWarp>
+              <a:noAutofit/>
+            </a:bodyPr>
+            <a:lstStyle/>
+            <a:p>
+              <a:pPr algn="ctr"/>
+              <a:endParaRPr lang="es-MX" sz="16600" dirty="0">
+                <a:latin typeface="Bauhaus 93" panose="04030905020B02020C02" pitchFamily="82" charset="0"/>
+              </a:endParaRPr>
+            </a:p>
+          </p:txBody>
+        </p:sp>
+        <p:sp>
+          <p:nvSpPr>
+            <p:cNvPr id="16" name="TextBox 15">
+              <a:extLst>
+                <a:ext uri="{FF2B5EF4-FFF2-40B4-BE49-F238E27FC236}">
+                  <a16:creationId xmlns:a16="http://schemas.microsoft.com/office/drawing/2014/main" id="{24252E55-303A-E11B-D4D3-3DE76CB5B15C}"/>
+                </a:ext>
+              </a:extLst>
+            </p:cNvPr>
+            <p:cNvSpPr txBox="1"/>
+            <p:nvPr/>
+          </p:nvSpPr>
+          <p:spPr>
+            <a:xfrm>
+              <a:off x="5808530" y="1016179"/>
+              <a:ext cx="422091" cy="1403007"/>
+            </a:xfrm>
+            <a:custGeom>
+              <a:avLst/>
+              <a:gdLst/>
+              <a:ahLst/>
+              <a:cxnLst/>
+              <a:rect l="l" t="t" r="r" b="b"/>
+              <a:pathLst>
+                <a:path w="422091" h="1403007">
+                  <a:moveTo>
+                    <a:pt x="0" y="0"/>
+                  </a:moveTo>
+                  <a:lnTo>
+                    <a:pt x="422091" y="0"/>
+                  </a:lnTo>
+                  <a:lnTo>
+                    <a:pt x="422091" y="376191"/>
+                  </a:lnTo>
+                  <a:lnTo>
+                    <a:pt x="417305" y="376191"/>
+                  </a:lnTo>
+                  <a:lnTo>
+                    <a:pt x="417305" y="1403007"/>
+                  </a:lnTo>
+                  <a:lnTo>
+                    <a:pt x="0" y="1403007"/>
+                  </a:lnTo>
+                  <a:lnTo>
+                    <a:pt x="0" y="0"/>
+                  </a:lnTo>
+                  <a:close/>
+                </a:path>
+              </a:pathLst>
+            </a:custGeom>
+            <a:solidFill>
+              <a:srgbClr val="1181C3"/>
+            </a:solidFill>
+            <a:ln>
+              <a:noFill/>
+            </a:ln>
+            <a:effectLst/>
+          </p:spPr>
+          <p:txBody>
+            <a:bodyPr rot="0" spcFirstLastPara="0" vertOverflow="overflow" horzOverflow="overflow" vert="horz" wrap="square" lIns="91440" tIns="45720" rIns="91440" bIns="45720" numCol="1" spcCol="0" rtlCol="0" fromWordArt="0" anchor="t" anchorCtr="0" forceAA="0" compatLnSpc="1">
+              <a:prstTxWarp prst="textNoShape">
+                <a:avLst/>
+              </a:prstTxWarp>
+              <a:noAutofit/>
+            </a:bodyPr>
+            <a:lstStyle/>
+            <a:p>
+              <a:pPr algn="ctr"/>
+              <a:endParaRPr lang="es-MX" sz="16600" dirty="0">
+                <a:latin typeface="Bauhaus 93" panose="04030905020B02020C02" pitchFamily="82" charset="0"/>
+              </a:endParaRPr>
+            </a:p>
+          </p:txBody>
+        </p:sp>
+        <p:sp>
+          <p:nvSpPr>
+            <p:cNvPr id="14" name="TextBox 13">
+              <a:extLst>
+                <a:ext uri="{FF2B5EF4-FFF2-40B4-BE49-F238E27FC236}">
+                  <a16:creationId xmlns:a16="http://schemas.microsoft.com/office/drawing/2014/main" id="{DA33B2BE-82F1-3164-279C-2CAD3C2EC7EE}"/>
+                </a:ext>
+              </a:extLst>
+            </p:cNvPr>
+            <p:cNvSpPr txBox="1"/>
+            <p:nvPr/>
+          </p:nvSpPr>
+          <p:spPr>
+            <a:xfrm>
+              <a:off x="6230620" y="1016179"/>
+              <a:ext cx="610892" cy="1403007"/>
+            </a:xfrm>
+            <a:custGeom>
+              <a:avLst/>
+              <a:gdLst/>
+              <a:ahLst/>
+              <a:cxnLst/>
+              <a:rect l="l" t="t" r="r" b="b"/>
+              <a:pathLst>
+                <a:path w="610892" h="1403007">
+                  <a:moveTo>
+                    <a:pt x="0" y="0"/>
+                  </a:moveTo>
+                  <a:lnTo>
+                    <a:pt x="87720" y="0"/>
+                  </a:lnTo>
+                  <a:cubicBezTo>
+                    <a:pt x="389906" y="0"/>
+                    <a:pt x="540999" y="118887"/>
+                    <a:pt x="540999" y="356662"/>
+                  </a:cubicBezTo>
+                  <a:cubicBezTo>
+                    <a:pt x="540999" y="474521"/>
+                    <a:pt x="489264" y="572509"/>
+                    <a:pt x="385794" y="650625"/>
+                  </a:cubicBezTo>
+                  <a:cubicBezTo>
+                    <a:pt x="535859" y="715722"/>
+                    <a:pt x="610892" y="831868"/>
+                    <a:pt x="610892" y="999064"/>
+                  </a:cubicBezTo>
+                  <a:cubicBezTo>
+                    <a:pt x="610892" y="1127202"/>
+                    <a:pt x="566695" y="1229302"/>
+                    <a:pt x="478300" y="1305362"/>
+                  </a:cubicBezTo>
+                  <a:cubicBezTo>
+                    <a:pt x="435131" y="1341679"/>
+                    <a:pt x="388878" y="1367033"/>
+                    <a:pt x="339541" y="1381422"/>
+                  </a:cubicBezTo>
+                  <a:cubicBezTo>
+                    <a:pt x="290205" y="1395812"/>
+                    <a:pt x="223738" y="1403007"/>
+                    <a:pt x="140140" y="1403007"/>
+                  </a:cubicBezTo>
+                  <a:lnTo>
+                    <a:pt x="60996" y="1403007"/>
+                  </a:lnTo>
+                  <a:lnTo>
+                    <a:pt x="60996" y="1042234"/>
+                  </a:lnTo>
+                  <a:lnTo>
+                    <a:pt x="131917" y="1042234"/>
+                  </a:lnTo>
+                  <a:cubicBezTo>
+                    <a:pt x="173716" y="1042234"/>
+                    <a:pt x="203181" y="1036923"/>
+                    <a:pt x="220312" y="1026302"/>
+                  </a:cubicBezTo>
+                  <a:cubicBezTo>
+                    <a:pt x="237442" y="1015681"/>
+                    <a:pt x="246008" y="997009"/>
+                    <a:pt x="246008" y="970285"/>
+                  </a:cubicBezTo>
+                  <a:cubicBezTo>
+                    <a:pt x="246008" y="925060"/>
+                    <a:pt x="211061" y="902447"/>
+                    <a:pt x="141168" y="902447"/>
+                  </a:cubicBezTo>
+                  <a:lnTo>
+                    <a:pt x="60996" y="902447"/>
+                  </a:lnTo>
+                  <a:lnTo>
+                    <a:pt x="60996" y="528312"/>
+                  </a:lnTo>
+                  <a:cubicBezTo>
+                    <a:pt x="137741" y="528312"/>
+                    <a:pt x="176115" y="501930"/>
+                    <a:pt x="176115" y="449168"/>
+                  </a:cubicBezTo>
+                  <a:cubicBezTo>
+                    <a:pt x="176115" y="400516"/>
+                    <a:pt x="141510" y="376191"/>
+                    <a:pt x="72302" y="376191"/>
+                  </a:cubicBezTo>
+                  <a:lnTo>
+                    <a:pt x="0" y="376191"/>
+                  </a:lnTo>
+                  <a:lnTo>
+                    <a:pt x="0" y="0"/>
+                  </a:lnTo>
+                  <a:close/>
+                </a:path>
+              </a:pathLst>
+            </a:custGeom>
+            <a:solidFill>
+              <a:srgbClr val="ED7237"/>
+            </a:solidFill>
+            <a:ln>
+              <a:noFill/>
+            </a:ln>
+            <a:effectLst/>
+          </p:spPr>
+          <p:txBody>
+            <a:bodyPr rot="0" spcFirstLastPara="0" vertOverflow="overflow" horzOverflow="overflow" vert="horz" wrap="square" lIns="91440" tIns="45720" rIns="91440" bIns="45720" numCol="1" spcCol="0" rtlCol="0" fromWordArt="0" anchor="t" anchorCtr="0" forceAA="0" compatLnSpc="1">
+              <a:prstTxWarp prst="textNoShape">
+                <a:avLst/>
+              </a:prstTxWarp>
+              <a:noAutofit/>
+            </a:bodyPr>
+            <a:lstStyle/>
+            <a:p>
+              <a:pPr algn="ctr"/>
+              <a:endParaRPr lang="es-MX" sz="16600" dirty="0">
+                <a:latin typeface="Bauhaus 93" panose="04030905020B02020C02" pitchFamily="82" charset="0"/>
+              </a:endParaRPr>
+            </a:p>
+          </p:txBody>
+        </p:sp>
+        <p:sp>
+          <p:nvSpPr>
+            <p:cNvPr id="13" name="TextBox 12">
+              <a:extLst>
+                <a:ext uri="{FF2B5EF4-FFF2-40B4-BE49-F238E27FC236}">
+                  <a16:creationId xmlns:a16="http://schemas.microsoft.com/office/drawing/2014/main" id="{E15E7F9F-DC10-F2A4-952F-32D14B8F8531}"/>
+                </a:ext>
+              </a:extLst>
+            </p:cNvPr>
+            <p:cNvSpPr txBox="1"/>
+            <p:nvPr/>
+          </p:nvSpPr>
+          <p:spPr>
+            <a:xfrm>
+              <a:off x="6979900" y="1016179"/>
+              <a:ext cx="803774" cy="1403007"/>
+            </a:xfrm>
+            <a:custGeom>
+              <a:avLst/>
+              <a:gdLst/>
+              <a:ahLst/>
+              <a:cxnLst/>
+              <a:rect l="l" t="t" r="r" b="b"/>
+              <a:pathLst>
+                <a:path w="803774" h="1403007">
+                  <a:moveTo>
+                    <a:pt x="440945" y="0"/>
+                  </a:moveTo>
+                  <a:lnTo>
+                    <a:pt x="803774" y="0"/>
+                  </a:lnTo>
+                  <a:lnTo>
+                    <a:pt x="803774" y="402915"/>
+                  </a:lnTo>
+                  <a:lnTo>
+                    <a:pt x="537562" y="402915"/>
+                  </a:lnTo>
+                  <a:cubicBezTo>
+                    <a:pt x="465613" y="402915"/>
+                    <a:pt x="429638" y="426212"/>
+                    <a:pt x="429638" y="472808"/>
+                  </a:cubicBezTo>
+                  <a:cubicBezTo>
+                    <a:pt x="429638" y="500217"/>
+                    <a:pt x="438204" y="519232"/>
+                    <a:pt x="455335" y="529853"/>
+                  </a:cubicBezTo>
+                  <a:cubicBezTo>
+                    <a:pt x="472465" y="540474"/>
+                    <a:pt x="502958" y="545785"/>
+                    <a:pt x="546813" y="545785"/>
+                  </a:cubicBezTo>
+                  <a:lnTo>
+                    <a:pt x="777050" y="545785"/>
+                  </a:lnTo>
+                  <a:lnTo>
+                    <a:pt x="777050" y="858250"/>
+                  </a:lnTo>
+                  <a:lnTo>
+                    <a:pt x="504671" y="858250"/>
+                  </a:lnTo>
+                  <a:cubicBezTo>
+                    <a:pt x="467669" y="858250"/>
+                    <a:pt x="441459" y="863731"/>
+                    <a:pt x="426041" y="874695"/>
+                  </a:cubicBezTo>
+                  <a:cubicBezTo>
+                    <a:pt x="410623" y="885659"/>
+                    <a:pt x="402914" y="904160"/>
+                    <a:pt x="402914" y="930199"/>
+                  </a:cubicBezTo>
+                  <a:cubicBezTo>
+                    <a:pt x="402914" y="959664"/>
+                    <a:pt x="410794" y="979021"/>
+                    <a:pt x="426555" y="988272"/>
+                  </a:cubicBezTo>
+                  <a:cubicBezTo>
+                    <a:pt x="442315" y="997523"/>
+                    <a:pt x="474521" y="1002148"/>
+                    <a:pt x="523172" y="1002148"/>
+                  </a:cubicBezTo>
+                  <a:lnTo>
+                    <a:pt x="803774" y="1002148"/>
+                  </a:lnTo>
+                  <a:lnTo>
+                    <a:pt x="803774" y="1403007"/>
+                  </a:lnTo>
+                  <a:lnTo>
+                    <a:pt x="475891" y="1403007"/>
+                  </a:lnTo>
+                  <a:cubicBezTo>
+                    <a:pt x="321715" y="1403007"/>
+                    <a:pt x="203855" y="1366176"/>
+                    <a:pt x="122313" y="1292514"/>
+                  </a:cubicBezTo>
+                  <a:cubicBezTo>
+                    <a:pt x="40770" y="1218852"/>
+                    <a:pt x="0" y="1112470"/>
+                    <a:pt x="0" y="973368"/>
+                  </a:cubicBezTo>
+                  <a:lnTo>
+                    <a:pt x="0" y="423472"/>
+                  </a:lnTo>
+                  <a:cubicBezTo>
+                    <a:pt x="0" y="289167"/>
+                    <a:pt x="38544" y="185012"/>
+                    <a:pt x="115632" y="111007"/>
+                  </a:cubicBezTo>
+                  <a:cubicBezTo>
+                    <a:pt x="192720" y="37002"/>
+                    <a:pt x="301158" y="0"/>
+                    <a:pt x="440945" y="0"/>
+                  </a:cubicBezTo>
+                  <a:close/>
+                </a:path>
+              </a:pathLst>
+            </a:custGeom>
+            <a:solidFill>
+              <a:srgbClr val="ED7237"/>
+            </a:solidFill>
+            <a:ln>
+              <a:noFill/>
+            </a:ln>
+            <a:effectLst/>
+          </p:spPr>
+          <p:txBody>
+            <a:bodyPr rot="0" spcFirstLastPara="0" vertOverflow="overflow" horzOverflow="overflow" vert="horz" wrap="square" lIns="91440" tIns="45720" rIns="91440" bIns="45720" numCol="1" spcCol="0" rtlCol="0" fromWordArt="0" anchor="t" anchorCtr="0" forceAA="0" compatLnSpc="1">
+              <a:prstTxWarp prst="textNoShape">
+                <a:avLst/>
+              </a:prstTxWarp>
+              <a:noAutofit/>
+            </a:bodyPr>
+            <a:lstStyle/>
+            <a:p>
+              <a:pPr algn="ctr"/>
+              <a:endParaRPr lang="es-MX" sz="16600" dirty="0">
+                <a:latin typeface="Bauhaus 93" panose="04030905020B02020C02" pitchFamily="82" charset="0"/>
+              </a:endParaRPr>
+            </a:p>
+          </p:txBody>
+        </p:sp>
+        <p:sp>
+          <p:nvSpPr>
+            <p:cNvPr id="25" name="Rectangle 24">
+              <a:extLst>
+                <a:ext uri="{FF2B5EF4-FFF2-40B4-BE49-F238E27FC236}">
+                  <a16:creationId xmlns:a16="http://schemas.microsoft.com/office/drawing/2014/main" id="{998E8F3B-343F-AFEF-33F4-1A54A15E0B19}"/>
+                </a:ext>
+              </a:extLst>
+            </p:cNvPr>
+            <p:cNvSpPr/>
+            <p:nvPr/>
+          </p:nvSpPr>
+          <p:spPr>
+            <a:xfrm flipH="1">
+              <a:off x="6223987" y="1016179"/>
+              <a:ext cx="68228" cy="1403007"/>
+            </a:xfrm>
+            <a:prstGeom prst="rect">
+              <a:avLst/>
+            </a:prstGeom>
+            <a:solidFill>
+              <a:schemeClr val="bg1"/>
+            </a:solidFill>
+            <a:ln>
+              <a:noFill/>
+            </a:ln>
+          </p:spPr>
+          <p:style>
+            <a:lnRef idx="2">
+              <a:schemeClr val="accent1">
+                <a:shade val="15000"/>
+              </a:schemeClr>
+            </a:lnRef>
+            <a:fillRef idx="1">
+              <a:schemeClr val="accent1"/>
+            </a:fillRef>
+            <a:effectRef idx="0">
+              <a:schemeClr val="accent1"/>
+            </a:effectRef>
+            <a:fontRef idx="minor">
+              <a:schemeClr val="lt1"/>
+            </a:fontRef>
+          </p:style>
+          <p:txBody>
+            <a:bodyPr rtlCol="0" anchor="ctr"/>
+            <a:lstStyle/>
+            <a:p>
+              <a:pPr algn="ctr"/>
+              <a:endParaRPr lang="es-MX" dirty="0"/>
+            </a:p>
+          </p:txBody>
+        </p:sp>
+      </p:grpSp>
+      <p:sp>
+        <p:nvSpPr>
+          <p:cNvPr id="27" name="TextBox 26">
+            <a:extLst>
+              <a:ext uri="{FF2B5EF4-FFF2-40B4-BE49-F238E27FC236}">
+                <a16:creationId xmlns:a16="http://schemas.microsoft.com/office/drawing/2014/main" id="{35D1659D-104C-8DEA-609C-EDF6107E82F9}"/>
+              </a:ext>
+            </a:extLst>
+          </p:cNvPr>
+          <p:cNvSpPr txBox="1"/>
+          <p:nvPr/>
+        </p:nvSpPr>
+        <p:spPr>
+          <a:xfrm>
+            <a:off x="4704080" y="4072795"/>
+            <a:ext cx="2783840" cy="584775"/>
+          </a:xfrm>
+          <a:prstGeom prst="rect">
+            <a:avLst/>
+          </a:prstGeom>
+          <a:noFill/>
+        </p:spPr>
+        <p:txBody>
+          <a:bodyPr wrap="square" rtlCol="0">
+            <a:spAutoFit/>
+          </a:bodyPr>
+          <a:lstStyle/>
+          <a:p>
+            <a:pPr algn="ctr"/>
+            <a:r>
+              <a:rPr lang="en-US" sz="3200" dirty="0">
+                <a:ln w="12700">
+                  <a:solidFill>
+                    <a:srgbClr val="ED7237"/>
+                  </a:solidFill>
+                </a:ln>
+                <a:solidFill>
+                  <a:srgbClr val="ED7237"/>
+                </a:solidFill>
+                <a:latin typeface="Bahnschrift SemiBold Condensed" panose="020B0502040204020203" pitchFamily="34" charset="0"/>
+                <a:cs typeface="Aharoni" panose="02010803020104030203" pitchFamily="2" charset="-79"/>
+              </a:rPr>
+              <a:t>Rutas Baja Express</a:t>
+            </a:r>
+            <a:endParaRPr lang="es-MX" sz="3200" dirty="0">
+              <a:ln w="12700">
+                <a:solidFill>
+                  <a:srgbClr val="ED7237"/>
+                </a:solidFill>
+              </a:ln>
+              <a:solidFill>
+                <a:srgbClr val="ED7237"/>
+              </a:solidFill>
+              <a:latin typeface="Bahnschrift SemiBold Condensed" panose="020B0502040204020203" pitchFamily="34" charset="0"/>
+              <a:cs typeface="Aharoni" panose="02010803020104030203" pitchFamily="2" charset="-79"/>
+            </a:endParaRPr>
+          </a:p>
+        </p:txBody>
+      </p:sp>
     </p:spTree>
     <p:extLst>
       <p:ext uri="{BB962C8B-B14F-4D97-AF65-F5344CB8AC3E}">
@@ -3398,1426 +4349,6 @@
   <p:clrMapOvr>
     <a:masterClrMapping/>
   </p:clrMapOvr>
-</p:sld>
-</file>
-
-<file path=ppt/slides/slide3.xml><?xml version="1.0" encoding="utf-8"?>
-<p:sld xmlns:a="http://schemas.openxmlformats.org/drawingml/2006/main" xmlns:r="http://schemas.openxmlformats.org/officeDocument/2006/relationships" xmlns:p="http://schemas.openxmlformats.org/presentationml/2006/main">
-  <p:cSld>
-    <p:spTree>
-      <p:nvGrpSpPr>
-        <p:cNvPr id="1" name=""/>
-        <p:cNvGrpSpPr/>
-        <p:nvPr/>
-      </p:nvGrpSpPr>
-      <p:grpSpPr>
-        <a:xfrm>
-          <a:off x="0" y="0"/>
-          <a:ext cx="0" cy="0"/>
-          <a:chOff x="0" y="0"/>
-          <a:chExt cx="0" cy="0"/>
-        </a:xfrm>
-      </p:grpSpPr>
-      <mc:AlternateContent xmlns:mc="http://schemas.openxmlformats.org/markup-compatibility/2006">
-        <mc:Choice xmlns:am3d="http://schemas.microsoft.com/office/drawing/2017/model3d" Requires="am3d">
-          <p:graphicFrame>
-            <p:nvGraphicFramePr>
-              <p:cNvPr id="2" name="3D Model 1" descr="Public Bus">
-                <a:extLst>
-                  <a:ext uri="{FF2B5EF4-FFF2-40B4-BE49-F238E27FC236}">
-                    <a16:creationId xmlns:a16="http://schemas.microsoft.com/office/drawing/2014/main" id="{9EDC643B-ED60-CEE1-B19D-FE38BF651823}"/>
-                  </a:ext>
-                </a:extLst>
-              </p:cNvPr>
-              <p:cNvGraphicFramePr>
-                <a:graphicFrameLocks noChangeAspect="1"/>
-              </p:cNvGraphicFramePr>
-              <p:nvPr>
-                <p:extLst>
-                  <p:ext uri="{D42A27DB-BD31-4B8C-83A1-F6EECF244321}">
-                    <p14:modId xmlns:p14="http://schemas.microsoft.com/office/powerpoint/2010/main" val="3629665920"/>
-                  </p:ext>
-                </p:extLst>
-              </p:nvPr>
-            </p:nvGraphicFramePr>
-            <p:xfrm>
-              <a:off x="14302153" y="-6997503"/>
-              <a:ext cx="4410155" cy="2671673"/>
-            </p:xfrm>
-            <a:graphic>
-              <a:graphicData uri="http://schemas.microsoft.com/office/drawing/2017/model3d">
-                <am3d:model3d r:embed="rId2">
-                  <am3d:spPr>
-                    <a:xfrm>
-                      <a:off x="0" y="0"/>
-                      <a:ext cx="4410155" cy="2671673"/>
-                    </a:xfrm>
-                    <a:prstGeom prst="rect">
-                      <a:avLst/>
-                    </a:prstGeom>
-                  </am3d:spPr>
-                  <am3d:camera>
-                    <am3d:pos x="0" y="0" z="51119037"/>
-                    <am3d:up dx="0" dy="36000000" dz="0"/>
-                    <am3d:lookAt x="0" y="0" z="0"/>
-                    <am3d:perspective fov="2700000"/>
-                  </am3d:camera>
-                  <am3d:trans>
-                    <am3d:meterPerModelUnit n="149750" d="1000000"/>
-                    <am3d:preTrans dx="0" dy="-5693451" dz="0"/>
-                    <am3d:scale>
-                      <am3d:sx n="1000000" d="1000000"/>
-                      <am3d:sy n="1000000" d="1000000"/>
-                      <am3d:sz n="1000000" d="1000000"/>
-                    </am3d:scale>
-                    <am3d:rot ax="1204795" ay="-2306338" az="-768182"/>
-                    <am3d:postTrans dx="0" dy="0" dz="0"/>
-                  </am3d:trans>
-                  <am3d:raster rName="Office3DRenderer" rVer="16.0.8326">
-                    <am3d:blip r:embed="rId3"/>
-                  </am3d:raster>
-                  <am3d:objViewport viewportSz="4850697"/>
-                  <am3d:ambientLight>
-                    <am3d:clr>
-                      <a:scrgbClr r="50000" g="50000" b="50000"/>
-                    </am3d:clr>
-                    <am3d:illuminance n="500000" d="1000000"/>
-                  </am3d:ambientLight>
-                  <am3d:ptLight rad="0">
-                    <am3d:clr>
-                      <a:scrgbClr r="100000" g="75000" b="50000"/>
-                    </am3d:clr>
-                    <am3d:intensity n="9765625" d="1000000"/>
-                    <am3d:pos x="21959998" y="70920001" z="16344003"/>
-                  </am3d:ptLight>
-                  <am3d:ptLight rad="0">
-                    <am3d:clr>
-                      <a:scrgbClr r="40000" g="60000" b="95000"/>
-                    </am3d:clr>
-                    <am3d:intensity n="12250000" d="1000000"/>
-                    <am3d:pos x="-37964106" y="51130435" z="57631972"/>
-                  </am3d:ptLight>
-                  <am3d:ptLight rad="0">
-                    <am3d:clr>
-                      <a:scrgbClr r="86837" g="72700" b="100000"/>
-                    </am3d:clr>
-                    <am3d:intensity n="3125000" d="1000000"/>
-                    <am3d:pos x="-37739122" y="58056624" z="-34769649"/>
-                  </am3d:ptLight>
-                </am3d:model3d>
-              </a:graphicData>
-            </a:graphic>
-          </p:graphicFrame>
-        </mc:Choice>
-        <mc:Fallback>
-          <p:pic>
-            <p:nvPicPr>
-              <p:cNvPr id="2" name="3D Model 1" descr="Public Bus">
-                <a:extLst>
-                  <a:ext uri="{FF2B5EF4-FFF2-40B4-BE49-F238E27FC236}">
-                    <a16:creationId xmlns:a16="http://schemas.microsoft.com/office/drawing/2014/main" id="{9EDC643B-ED60-CEE1-B19D-FE38BF651823}"/>
-                  </a:ext>
-                </a:extLst>
-              </p:cNvPr>
-              <p:cNvPicPr>
-                <a:picLocks noGrp="1" noRot="1" noChangeAspect="1" noMove="1" noResize="1" noEditPoints="1" noAdjustHandles="1" noChangeArrowheads="1" noChangeShapeType="1" noCrop="1"/>
-              </p:cNvPicPr>
-              <p:nvPr/>
-            </p:nvPicPr>
-            <p:blipFill>
-              <a:blip r:embed="rId3"/>
-              <a:stretch>
-                <a:fillRect/>
-              </a:stretch>
-            </p:blipFill>
-            <p:spPr>
-              <a:xfrm>
-                <a:off x="14302153" y="-6997503"/>
-                <a:ext cx="4410155" cy="2671673"/>
-              </a:xfrm>
-              <a:prstGeom prst="rect">
-                <a:avLst/>
-              </a:prstGeom>
-            </p:spPr>
-          </p:pic>
-        </mc:Fallback>
-      </mc:AlternateContent>
-      <p:sp>
-        <p:nvSpPr>
-          <p:cNvPr id="3" name="Rectangle 2">
-            <a:extLst>
-              <a:ext uri="{FF2B5EF4-FFF2-40B4-BE49-F238E27FC236}">
-                <a16:creationId xmlns:a16="http://schemas.microsoft.com/office/drawing/2014/main" id="{5C5E1034-72EE-AC04-4A9C-4E950EDE76EA}"/>
-              </a:ext>
-            </a:extLst>
-          </p:cNvPr>
-          <p:cNvSpPr/>
-          <p:nvPr/>
-        </p:nvSpPr>
-        <p:spPr>
-          <a:xfrm>
-            <a:off x="0" y="0"/>
-            <a:ext cx="12192000" cy="6858000"/>
-          </a:xfrm>
-          <a:prstGeom prst="rect">
-            <a:avLst/>
-          </a:prstGeom>
-        </p:spPr>
-        <p:style>
-          <a:lnRef idx="2">
-            <a:schemeClr val="accent1">
-              <a:shade val="15000"/>
-            </a:schemeClr>
-          </a:lnRef>
-          <a:fillRef idx="1">
-            <a:schemeClr val="accent1"/>
-          </a:fillRef>
-          <a:effectRef idx="0">
-            <a:schemeClr val="accent1"/>
-          </a:effectRef>
-          <a:fontRef idx="minor">
-            <a:schemeClr val="lt1"/>
-          </a:fontRef>
-        </p:style>
-        <p:txBody>
-          <a:bodyPr rtlCol="0" anchor="ctr"/>
-          <a:lstStyle/>
-          <a:p>
-            <a:pPr algn="ctr"/>
-            <a:endParaRPr lang="es-MX"/>
-          </a:p>
-        </p:txBody>
-      </p:sp>
-    </p:spTree>
-    <p:extLst>
-      <p:ext uri="{BB962C8B-B14F-4D97-AF65-F5344CB8AC3E}">
-        <p14:creationId xmlns:p14="http://schemas.microsoft.com/office/powerpoint/2010/main" val="2639672589"/>
-      </p:ext>
-    </p:extLst>
-  </p:cSld>
-  <p:clrMapOvr>
-    <a:masterClrMapping/>
-  </p:clrMapOvr>
-</p:sld>
-</file>
-
-<file path=ppt/slides/slide4.xml><?xml version="1.0" encoding="utf-8"?>
-<p:sld xmlns:a="http://schemas.openxmlformats.org/drawingml/2006/main" xmlns:r="http://schemas.openxmlformats.org/officeDocument/2006/relationships" xmlns:p="http://schemas.openxmlformats.org/presentationml/2006/main">
-  <p:cSld>
-    <p:spTree>
-      <p:nvGrpSpPr>
-        <p:cNvPr id="1" name="">
-          <a:extLst>
-            <a:ext uri="{FF2B5EF4-FFF2-40B4-BE49-F238E27FC236}">
-              <a16:creationId xmlns:a16="http://schemas.microsoft.com/office/drawing/2014/main" id="{5231E15E-B012-009A-8033-15A3F6529107}"/>
-            </a:ext>
-          </a:extLst>
-        </p:cNvPr>
-        <p:cNvGrpSpPr/>
-        <p:nvPr/>
-      </p:nvGrpSpPr>
-      <p:grpSpPr>
-        <a:xfrm>
-          <a:off x="0" y="0"/>
-          <a:ext cx="0" cy="0"/>
-          <a:chOff x="0" y="0"/>
-          <a:chExt cx="0" cy="0"/>
-        </a:xfrm>
-      </p:grpSpPr>
-      <mc:AlternateContent xmlns:mc="http://schemas.openxmlformats.org/markup-compatibility/2006">
-        <mc:Choice xmlns:am3d="http://schemas.microsoft.com/office/drawing/2017/model3d" Requires="am3d">
-          <p:graphicFrame>
-            <p:nvGraphicFramePr>
-              <p:cNvPr id="2" name="3D Model 1" descr="Public Bus">
-                <a:extLst>
-                  <a:ext uri="{FF2B5EF4-FFF2-40B4-BE49-F238E27FC236}">
-                    <a16:creationId xmlns:a16="http://schemas.microsoft.com/office/drawing/2014/main" id="{DB5734AC-9C70-5A8E-FDB6-71B0A29B0477}"/>
-                  </a:ext>
-                </a:extLst>
-              </p:cNvPr>
-              <p:cNvGraphicFramePr>
-                <a:graphicFrameLocks noChangeAspect="1"/>
-              </p:cNvGraphicFramePr>
-              <p:nvPr>
-                <p:extLst>
-                  <p:ext uri="{D42A27DB-BD31-4B8C-83A1-F6EECF244321}">
-                    <p14:modId xmlns:p14="http://schemas.microsoft.com/office/powerpoint/2010/main" val="65239978"/>
-                  </p:ext>
-                </p:extLst>
-              </p:nvPr>
-            </p:nvGraphicFramePr>
-            <p:xfrm>
-              <a:off x="7284850" y="132293"/>
-              <a:ext cx="7298653" cy="6581385"/>
-            </p:xfrm>
-            <a:graphic>
-              <a:graphicData uri="http://schemas.microsoft.com/office/drawing/2017/model3d">
-                <am3d:model3d r:embed="rId2">
-                  <am3d:spPr>
-                    <a:xfrm>
-                      <a:off x="0" y="0"/>
-                      <a:ext cx="7298653" cy="6581385"/>
-                    </a:xfrm>
-                    <a:prstGeom prst="rect">
-                      <a:avLst/>
-                    </a:prstGeom>
-                  </am3d:spPr>
-                  <am3d:camera>
-                    <am3d:pos x="0" y="0" z="51119037"/>
-                    <am3d:up dx="0" dy="36000000" dz="0"/>
-                    <am3d:lookAt x="0" y="0" z="0"/>
-                    <am3d:perspective fov="2700000"/>
-                  </am3d:camera>
-                  <am3d:trans>
-                    <am3d:meterPerModelUnit n="149750" d="1000000"/>
-                    <am3d:preTrans dx="0" dy="-5693451" dz="0"/>
-                    <am3d:scale>
-                      <am3d:sx n="1000000" d="1000000"/>
-                      <am3d:sy n="1000000" d="1000000"/>
-                      <am3d:sz n="1000000" d="1000000"/>
-                    </am3d:scale>
-                    <am3d:rot/>
-                    <am3d:postTrans dx="0" dy="0" dz="0"/>
-                  </am3d:trans>
-                  <am3d:raster rName="Office3DRenderer" rVer="16.0.8326">
-                    <am3d:blip r:embed="rId3"/>
-                  </am3d:raster>
-                  <am3d:objViewport viewportSz="19534313"/>
-                  <am3d:ambientLight>
-                    <am3d:clr>
-                      <a:scrgbClr r="50000" g="50000" b="50000"/>
-                    </am3d:clr>
-                    <am3d:illuminance n="500000" d="1000000"/>
-                  </am3d:ambientLight>
-                  <am3d:ptLight rad="0">
-                    <am3d:clr>
-                      <a:scrgbClr r="100000" g="75000" b="50000"/>
-                    </am3d:clr>
-                    <am3d:intensity n="9765625" d="1000000"/>
-                    <am3d:pos x="21959998" y="70920001" z="16344003"/>
-                  </am3d:ptLight>
-                  <am3d:ptLight rad="0">
-                    <am3d:clr>
-                      <a:scrgbClr r="40000" g="60000" b="95000"/>
-                    </am3d:clr>
-                    <am3d:intensity n="12250000" d="1000000"/>
-                    <am3d:pos x="-37964106" y="51130435" z="57631972"/>
-                  </am3d:ptLight>
-                  <am3d:ptLight rad="0">
-                    <am3d:clr>
-                      <a:scrgbClr r="86837" g="72700" b="100000"/>
-                    </am3d:clr>
-                    <am3d:intensity n="3125000" d="1000000"/>
-                    <am3d:pos x="-37739122" y="58056624" z="-34769649"/>
-                  </am3d:ptLight>
-                </am3d:model3d>
-              </a:graphicData>
-            </a:graphic>
-          </p:graphicFrame>
-        </mc:Choice>
-        <mc:Fallback>
-          <p:pic>
-            <p:nvPicPr>
-              <p:cNvPr id="2" name="3D Model 1" descr="Public Bus">
-                <a:extLst>
-                  <a:ext uri="{FF2B5EF4-FFF2-40B4-BE49-F238E27FC236}">
-                    <a16:creationId xmlns:a16="http://schemas.microsoft.com/office/drawing/2014/main" id="{DB5734AC-9C70-5A8E-FDB6-71B0A29B0477}"/>
-                  </a:ext>
-                </a:extLst>
-              </p:cNvPr>
-              <p:cNvPicPr>
-                <a:picLocks noGrp="1" noRot="1" noChangeAspect="1" noMove="1" noResize="1" noEditPoints="1" noAdjustHandles="1" noChangeArrowheads="1" noChangeShapeType="1" noCrop="1"/>
-              </p:cNvPicPr>
-              <p:nvPr/>
-            </p:nvPicPr>
-            <p:blipFill>
-              <a:blip r:embed="rId3"/>
-              <a:stretch>
-                <a:fillRect/>
-              </a:stretch>
-            </p:blipFill>
-            <p:spPr>
-              <a:xfrm>
-                <a:off x="7284850" y="132293"/>
-                <a:ext cx="7298653" cy="6581385"/>
-              </a:xfrm>
-              <a:prstGeom prst="rect">
-                <a:avLst/>
-              </a:prstGeom>
-            </p:spPr>
-          </p:pic>
-        </mc:Fallback>
-      </mc:AlternateContent>
-    </p:spTree>
-    <p:extLst>
-      <p:ext uri="{BB962C8B-B14F-4D97-AF65-F5344CB8AC3E}">
-        <p14:creationId xmlns:p14="http://schemas.microsoft.com/office/powerpoint/2010/main" val="1160964675"/>
-      </p:ext>
-    </p:extLst>
-  </p:cSld>
-  <p:clrMapOvr>
-    <a:masterClrMapping/>
-  </p:clrMapOvr>
-  <mc:AlternateContent xmlns:mc="http://schemas.openxmlformats.org/markup-compatibility/2006" xmlns:p159="http://schemas.microsoft.com/office/powerpoint/2015/09/main">
-    <mc:Choice Requires="p159">
-      <p:transition xmlns:p14="http://schemas.microsoft.com/office/powerpoint/2010/main" spd="slow" p14:dur="2000">
-        <p159:morph option="byObject"/>
-      </p:transition>
-    </mc:Choice>
-    <mc:Fallback xmlns="">
-      <p:transition spd="slow">
-        <p:fade/>
-      </p:transition>
-    </mc:Fallback>
-  </mc:AlternateContent>
-</p:sld>
-</file>
-
-<file path=ppt/slides/slide5.xml><?xml version="1.0" encoding="utf-8"?>
-<p:sld xmlns:a="http://schemas.openxmlformats.org/drawingml/2006/main" xmlns:r="http://schemas.openxmlformats.org/officeDocument/2006/relationships" xmlns:p="http://schemas.openxmlformats.org/presentationml/2006/main">
-  <p:cSld>
-    <p:spTree>
-      <p:nvGrpSpPr>
-        <p:cNvPr id="1" name="">
-          <a:extLst>
-            <a:ext uri="{FF2B5EF4-FFF2-40B4-BE49-F238E27FC236}">
-              <a16:creationId xmlns:a16="http://schemas.microsoft.com/office/drawing/2014/main" id="{AEDB9EA0-9529-2123-1DA5-58D4C9BB5439}"/>
-            </a:ext>
-          </a:extLst>
-        </p:cNvPr>
-        <p:cNvGrpSpPr/>
-        <p:nvPr/>
-      </p:nvGrpSpPr>
-      <p:grpSpPr>
-        <a:xfrm>
-          <a:off x="0" y="0"/>
-          <a:ext cx="0" cy="0"/>
-          <a:chOff x="0" y="0"/>
-          <a:chExt cx="0" cy="0"/>
-        </a:xfrm>
-      </p:grpSpPr>
-      <mc:AlternateContent xmlns:mc="http://schemas.openxmlformats.org/markup-compatibility/2006">
-        <mc:Choice xmlns:am3d="http://schemas.microsoft.com/office/drawing/2017/model3d" Requires="am3d">
-          <p:graphicFrame>
-            <p:nvGraphicFramePr>
-              <p:cNvPr id="3" name="3D Model 2" descr="Public Bus">
-                <a:extLst>
-                  <a:ext uri="{FF2B5EF4-FFF2-40B4-BE49-F238E27FC236}">
-                    <a16:creationId xmlns:a16="http://schemas.microsoft.com/office/drawing/2014/main" id="{BB780F17-45F4-EC7C-4C76-7D71BD8E3951}"/>
-                  </a:ext>
-                </a:extLst>
-              </p:cNvPr>
-              <p:cNvGraphicFramePr>
-                <a:graphicFrameLocks noChangeAspect="1"/>
-              </p:cNvGraphicFramePr>
-              <p:nvPr>
-                <p:extLst>
-                  <p:ext uri="{D42A27DB-BD31-4B8C-83A1-F6EECF244321}">
-                    <p14:modId xmlns:p14="http://schemas.microsoft.com/office/powerpoint/2010/main" val="4062496655"/>
-                  </p:ext>
-                </p:extLst>
-              </p:nvPr>
-            </p:nvGraphicFramePr>
-            <p:xfrm>
-              <a:off x="-7832250" y="4358049"/>
-              <a:ext cx="7832250" cy="2499950"/>
-            </p:xfrm>
-            <a:graphic>
-              <a:graphicData uri="http://schemas.microsoft.com/office/drawing/2017/model3d">
-                <am3d:model3d r:embed="rId2">
-                  <am3d:spPr>
-                    <a:xfrm>
-                      <a:off x="0" y="0"/>
-                      <a:ext cx="7832250" cy="2499950"/>
-                    </a:xfrm>
-                    <a:prstGeom prst="rect">
-                      <a:avLst/>
-                    </a:prstGeom>
-                  </am3d:spPr>
-                  <am3d:camera>
-                    <am3d:pos x="0" y="0" z="51119037"/>
-                    <am3d:up dx="0" dy="36000000" dz="0"/>
-                    <am3d:lookAt x="0" y="0" z="0"/>
-                    <am3d:perspective fov="2700000"/>
-                  </am3d:camera>
-                  <am3d:trans>
-                    <am3d:meterPerModelUnit n="149750" d="1000000"/>
-                    <am3d:preTrans dx="0" dy="-5693451" dz="0"/>
-                    <am3d:scale>
-                      <am3d:sx n="1000000" d="1000000"/>
-                      <am3d:sy n="1000000" d="1000000"/>
-                      <am3d:sz n="1000000" d="1000000"/>
-                    </am3d:scale>
-                    <am3d:rot ay="5400000"/>
-                    <am3d:postTrans dx="0" dy="0" dz="0"/>
-                  </am3d:trans>
-                  <am3d:raster rName="Office3DRenderer" rVer="16.0.8326">
-                    <am3d:blip r:embed="rId3"/>
-                  </am3d:raster>
-                  <am3d:objViewport viewportSz="8365186"/>
-                  <am3d:ambientLight>
-                    <am3d:clr>
-                      <a:scrgbClr r="50000" g="50000" b="50000"/>
-                    </am3d:clr>
-                    <am3d:illuminance n="500000" d="1000000"/>
-                  </am3d:ambientLight>
-                  <am3d:ptLight rad="0">
-                    <am3d:clr>
-                      <a:scrgbClr r="100000" g="75000" b="50000"/>
-                    </am3d:clr>
-                    <am3d:intensity n="9765625" d="1000000"/>
-                    <am3d:pos x="21959998" y="70920001" z="16344003"/>
-                  </am3d:ptLight>
-                  <am3d:ptLight rad="0">
-                    <am3d:clr>
-                      <a:scrgbClr r="40000" g="60000" b="95000"/>
-                    </am3d:clr>
-                    <am3d:intensity n="12250000" d="1000000"/>
-                    <am3d:pos x="-37964106" y="51130435" z="57631972"/>
-                  </am3d:ptLight>
-                  <am3d:ptLight rad="0">
-                    <am3d:clr>
-                      <a:scrgbClr r="86837" g="72700" b="100000"/>
-                    </am3d:clr>
-                    <am3d:intensity n="3125000" d="1000000"/>
-                    <am3d:pos x="-37739122" y="58056624" z="-34769649"/>
-                  </am3d:ptLight>
-                </am3d:model3d>
-              </a:graphicData>
-            </a:graphic>
-          </p:graphicFrame>
-        </mc:Choice>
-        <mc:Fallback>
-          <p:pic>
-            <p:nvPicPr>
-              <p:cNvPr id="3" name="3D Model 2" descr="Public Bus">
-                <a:extLst>
-                  <a:ext uri="{FF2B5EF4-FFF2-40B4-BE49-F238E27FC236}">
-                    <a16:creationId xmlns:a16="http://schemas.microsoft.com/office/drawing/2014/main" id="{BB780F17-45F4-EC7C-4C76-7D71BD8E3951}"/>
-                  </a:ext>
-                </a:extLst>
-              </p:cNvPr>
-              <p:cNvPicPr>
-                <a:picLocks noGrp="1" noRot="1" noChangeAspect="1" noMove="1" noResize="1" noEditPoints="1" noAdjustHandles="1" noChangeArrowheads="1" noChangeShapeType="1" noCrop="1"/>
-              </p:cNvPicPr>
-              <p:nvPr/>
-            </p:nvPicPr>
-            <p:blipFill>
-              <a:blip r:embed="rId3"/>
-              <a:stretch>
-                <a:fillRect/>
-              </a:stretch>
-            </p:blipFill>
-            <p:spPr>
-              <a:xfrm>
-                <a:off x="-7832250" y="4358049"/>
-                <a:ext cx="7832250" cy="2499950"/>
-              </a:xfrm>
-              <a:prstGeom prst="rect">
-                <a:avLst/>
-              </a:prstGeom>
-            </p:spPr>
-          </p:pic>
-        </mc:Fallback>
-      </mc:AlternateContent>
-      <mc:AlternateContent xmlns:mc="http://schemas.openxmlformats.org/markup-compatibility/2006">
-        <mc:Choice xmlns:am3d="http://schemas.microsoft.com/office/drawing/2017/model3d" Requires="am3d">
-          <p:graphicFrame>
-            <p:nvGraphicFramePr>
-              <p:cNvPr id="4" name="3D Model 3" descr="Public Bus">
-                <a:extLst>
-                  <a:ext uri="{FF2B5EF4-FFF2-40B4-BE49-F238E27FC236}">
-                    <a16:creationId xmlns:a16="http://schemas.microsoft.com/office/drawing/2014/main" id="{F1E5271C-BDB1-A459-AB9A-DDA95D1A2E48}"/>
-                  </a:ext>
-                </a:extLst>
-              </p:cNvPr>
-              <p:cNvGraphicFramePr>
-                <a:graphicFrameLocks noChangeAspect="1"/>
-              </p:cNvGraphicFramePr>
-              <p:nvPr>
-                <p:extLst>
-                  <p:ext uri="{D42A27DB-BD31-4B8C-83A1-F6EECF244321}">
-                    <p14:modId xmlns:p14="http://schemas.microsoft.com/office/powerpoint/2010/main" val="3939950449"/>
-                  </p:ext>
-                </p:extLst>
-              </p:nvPr>
-            </p:nvGraphicFramePr>
-            <p:xfrm>
-              <a:off x="13617334" y="6243066"/>
-              <a:ext cx="17893735" cy="9576392"/>
-            </p:xfrm>
-            <a:graphic>
-              <a:graphicData uri="http://schemas.microsoft.com/office/drawing/2017/model3d">
-                <am3d:model3d r:embed="rId2">
-                  <am3d:spPr>
-                    <a:xfrm>
-                      <a:off x="0" y="0"/>
-                      <a:ext cx="17893735" cy="9576392"/>
-                    </a:xfrm>
-                    <a:prstGeom prst="rect">
-                      <a:avLst/>
-                    </a:prstGeom>
-                  </am3d:spPr>
-                  <am3d:camera>
-                    <am3d:pos x="0" y="0" z="51119037"/>
-                    <am3d:up dx="0" dy="36000000" dz="0"/>
-                    <am3d:lookAt x="0" y="0" z="0"/>
-                    <am3d:perspective fov="2700000"/>
-                  </am3d:camera>
-                  <am3d:trans>
-                    <am3d:meterPerModelUnit n="149750" d="1000000"/>
-                    <am3d:preTrans dx="0" dy="-5693451" dz="0"/>
-                    <am3d:scale>
-                      <am3d:sx n="1000000" d="1000000"/>
-                      <am3d:sy n="1000000" d="1000000"/>
-                      <am3d:sz n="1000000" d="1000000"/>
-                    </am3d:scale>
-                    <am3d:rot ax="928375" ay="2423544" az="610179"/>
-                    <am3d:postTrans dx="0" dy="0" dz="0"/>
-                  </am3d:trans>
-                  <am3d:raster rName="Office3DRenderer" rVer="16.0.8326">
-                    <am3d:blip r:embed="rId4"/>
-                  </am3d:raster>
-                  <am3d:objViewport viewportSz="19534312"/>
-                  <am3d:ambientLight>
-                    <am3d:clr>
-                      <a:scrgbClr r="50000" g="50000" b="50000"/>
-                    </am3d:clr>
-                    <am3d:illuminance n="500000" d="1000000"/>
-                  </am3d:ambientLight>
-                  <am3d:ptLight rad="0">
-                    <am3d:clr>
-                      <a:scrgbClr r="100000" g="75000" b="50000"/>
-                    </am3d:clr>
-                    <am3d:intensity n="9765625" d="1000000"/>
-                    <am3d:pos x="21959998" y="70920001" z="16344003"/>
-                  </am3d:ptLight>
-                  <am3d:ptLight rad="0">
-                    <am3d:clr>
-                      <a:scrgbClr r="40000" g="60000" b="95000"/>
-                    </am3d:clr>
-                    <am3d:intensity n="12250000" d="1000000"/>
-                    <am3d:pos x="-37964106" y="51130435" z="57631972"/>
-                  </am3d:ptLight>
-                  <am3d:ptLight rad="0">
-                    <am3d:clr>
-                      <a:scrgbClr r="86837" g="72700" b="100000"/>
-                    </am3d:clr>
-                    <am3d:intensity n="3125000" d="1000000"/>
-                    <am3d:pos x="-37739122" y="58056624" z="-34769649"/>
-                  </am3d:ptLight>
-                </am3d:model3d>
-              </a:graphicData>
-            </a:graphic>
-          </p:graphicFrame>
-        </mc:Choice>
-        <mc:Fallback>
-          <p:pic>
-            <p:nvPicPr>
-              <p:cNvPr id="4" name="3D Model 3" descr="Public Bus">
-                <a:extLst>
-                  <a:ext uri="{FF2B5EF4-FFF2-40B4-BE49-F238E27FC236}">
-                    <a16:creationId xmlns:a16="http://schemas.microsoft.com/office/drawing/2014/main" id="{F1E5271C-BDB1-A459-AB9A-DDA95D1A2E48}"/>
-                  </a:ext>
-                </a:extLst>
-              </p:cNvPr>
-              <p:cNvPicPr>
-                <a:picLocks noGrp="1" noRot="1" noChangeAspect="1" noMove="1" noResize="1" noEditPoints="1" noAdjustHandles="1" noChangeArrowheads="1" noChangeShapeType="1" noCrop="1"/>
-              </p:cNvPicPr>
-              <p:nvPr/>
-            </p:nvPicPr>
-            <p:blipFill>
-              <a:blip r:embed="rId4"/>
-              <a:stretch>
-                <a:fillRect/>
-              </a:stretch>
-            </p:blipFill>
-            <p:spPr>
-              <a:xfrm>
-                <a:off x="13617334" y="6243066"/>
-                <a:ext cx="17893735" cy="9576392"/>
-              </a:xfrm>
-              <a:prstGeom prst="rect">
-                <a:avLst/>
-              </a:prstGeom>
-            </p:spPr>
-          </p:pic>
-        </mc:Fallback>
-      </mc:AlternateContent>
-    </p:spTree>
-    <p:extLst>
-      <p:ext uri="{BB962C8B-B14F-4D97-AF65-F5344CB8AC3E}">
-        <p14:creationId xmlns:p14="http://schemas.microsoft.com/office/powerpoint/2010/main" val="2624843033"/>
-      </p:ext>
-    </p:extLst>
-  </p:cSld>
-  <p:clrMapOvr>
-    <a:masterClrMapping/>
-  </p:clrMapOvr>
-  <mc:AlternateContent xmlns:mc="http://schemas.openxmlformats.org/markup-compatibility/2006" xmlns:p159="http://schemas.microsoft.com/office/powerpoint/2015/09/main">
-    <mc:Choice Requires="p159">
-      <p:transition xmlns:p14="http://schemas.microsoft.com/office/powerpoint/2010/main" spd="slow" p14:dur="2000">
-        <p159:morph option="byObject"/>
-      </p:transition>
-    </mc:Choice>
-    <mc:Fallback xmlns="">
-      <p:transition spd="slow">
-        <p:fade/>
-      </p:transition>
-    </mc:Fallback>
-  </mc:AlternateContent>
-  <p:timing>
-    <p:tnLst>
-      <p:par>
-        <p:cTn id="1" dur="indefinite" restart="never" nodeType="tmRoot">
-          <p:childTnLst>
-            <p:seq concurrent="1" nextAc="seek">
-              <p:cTn id="2" dur="indefinite" nodeType="mainSeq">
-                <p:childTnLst>
-                  <p:par>
-                    <p:cTn id="3" fill="hold">
-                      <p:stCondLst>
-                        <p:cond delay="indefinite"/>
-                        <p:cond evt="onBegin" delay="0">
-                          <p:tn val="2"/>
-                        </p:cond>
-                      </p:stCondLst>
-                      <p:childTnLst>
-                        <p:par>
-                          <p:cTn id="4" fill="hold">
-                            <p:stCondLst>
-                              <p:cond delay="0"/>
-                            </p:stCondLst>
-                            <p:childTnLst>
-                              <p:par>
-                                <p:cTn id="5" presetID="42" presetClass="path" presetSubtype="0" accel="50000" decel="50000" fill="hold" nodeType="withEffect">
-                                  <p:stCondLst>
-                                    <p:cond delay="0"/>
-                                  </p:stCondLst>
-                                  <p:childTnLst>
-                                    <p:animMotion origin="layout" path="M 3.95833E-6 -2.59259E-6 L 0.82122 -0.00046 " pathEditMode="relative" rAng="0" ptsTypes="AA">
-                                      <p:cBhvr>
-                                        <p:cTn id="6" dur="1000" fill="hold"/>
-                                        <p:tgtEl>
-                                          <p:spTgt spid="3"/>
-                                        </p:tgtEl>
-                                        <p:attrNameLst>
-                                          <p:attrName>ppt_x</p:attrName>
-                                          <p:attrName>ppt_y</p:attrName>
-                                        </p:attrNameLst>
-                                      </p:cBhvr>
-                                      <p:rCtr x="41055" y="-23"/>
-                                    </p:animMotion>
-                                  </p:childTnLst>
-                                </p:cTn>
-                              </p:par>
-                            </p:childTnLst>
-                          </p:cTn>
-                        </p:par>
-                      </p:childTnLst>
-                    </p:cTn>
-                  </p:par>
-                </p:childTnLst>
-              </p:cTn>
-              <p:prevCondLst>
-                <p:cond evt="onPrev" delay="0">
-                  <p:tgtEl>
-                    <p:sldTgt/>
-                  </p:tgtEl>
-                </p:cond>
-              </p:prevCondLst>
-              <p:nextCondLst>
-                <p:cond evt="onNext" delay="0">
-                  <p:tgtEl>
-                    <p:sldTgt/>
-                  </p:tgtEl>
-                </p:cond>
-              </p:nextCondLst>
-            </p:seq>
-          </p:childTnLst>
-        </p:cTn>
-      </p:par>
-    </p:tnLst>
-  </p:timing>
-</p:sld>
-</file>
-
-<file path=ppt/slides/slide6.xml><?xml version="1.0" encoding="utf-8"?>
-<p:sld xmlns:a="http://schemas.openxmlformats.org/drawingml/2006/main" xmlns:r="http://schemas.openxmlformats.org/officeDocument/2006/relationships" xmlns:p="http://schemas.openxmlformats.org/presentationml/2006/main">
-  <p:cSld>
-    <p:spTree>
-      <p:nvGrpSpPr>
-        <p:cNvPr id="1" name="">
-          <a:extLst>
-            <a:ext uri="{FF2B5EF4-FFF2-40B4-BE49-F238E27FC236}">
-              <a16:creationId xmlns:a16="http://schemas.microsoft.com/office/drawing/2014/main" id="{5DA15D2F-06CD-7E2A-AB25-7BF322B26982}"/>
-            </a:ext>
-          </a:extLst>
-        </p:cNvPr>
-        <p:cNvGrpSpPr/>
-        <p:nvPr/>
-      </p:nvGrpSpPr>
-      <p:grpSpPr>
-        <a:xfrm>
-          <a:off x="0" y="0"/>
-          <a:ext cx="0" cy="0"/>
-          <a:chOff x="0" y="0"/>
-          <a:chExt cx="0" cy="0"/>
-        </a:xfrm>
-      </p:grpSpPr>
-      <mc:AlternateContent xmlns:mc="http://schemas.openxmlformats.org/markup-compatibility/2006">
-        <mc:Choice xmlns:am3d="http://schemas.microsoft.com/office/drawing/2017/model3d" Requires="am3d">
-          <p:graphicFrame>
-            <p:nvGraphicFramePr>
-              <p:cNvPr id="2" name="3D Model 1" descr="Public Bus">
-                <a:extLst>
-                  <a:ext uri="{FF2B5EF4-FFF2-40B4-BE49-F238E27FC236}">
-                    <a16:creationId xmlns:a16="http://schemas.microsoft.com/office/drawing/2014/main" id="{E108DE42-EEE5-11AE-8AF9-0944F403A5E5}"/>
-                  </a:ext>
-                </a:extLst>
-              </p:cNvPr>
-              <p:cNvGraphicFramePr>
-                <a:graphicFrameLocks noChangeAspect="1"/>
-              </p:cNvGraphicFramePr>
-              <p:nvPr>
-                <p:extLst>
-                  <p:ext uri="{D42A27DB-BD31-4B8C-83A1-F6EECF244321}">
-                    <p14:modId xmlns:p14="http://schemas.microsoft.com/office/powerpoint/2010/main" val="2992856711"/>
-                  </p:ext>
-                </p:extLst>
-              </p:nvPr>
-            </p:nvGraphicFramePr>
-            <p:xfrm>
-              <a:off x="-3999664" y="5580148"/>
-              <a:ext cx="3999664" cy="1277852"/>
-            </p:xfrm>
-            <a:graphic>
-              <a:graphicData uri="http://schemas.microsoft.com/office/drawing/2017/model3d">
-                <am3d:model3d r:embed="rId2">
-                  <am3d:spPr>
-                    <a:xfrm>
-                      <a:off x="0" y="0"/>
-                      <a:ext cx="3999664" cy="1277852"/>
-                    </a:xfrm>
-                    <a:prstGeom prst="rect">
-                      <a:avLst/>
-                    </a:prstGeom>
-                  </am3d:spPr>
-                  <am3d:camera>
-                    <am3d:pos x="0" y="0" z="51119037"/>
-                    <am3d:up dx="0" dy="36000000" dz="0"/>
-                    <am3d:lookAt x="0" y="0" z="0"/>
-                    <am3d:perspective fov="2700000"/>
-                  </am3d:camera>
-                  <am3d:trans>
-                    <am3d:meterPerModelUnit n="149750" d="1000000"/>
-                    <am3d:preTrans dx="0" dy="-5693451" dz="0"/>
-                    <am3d:scale>
-                      <am3d:sx n="1000000" d="1000000"/>
-                      <am3d:sy n="1000000" d="1000000"/>
-                      <am3d:sz n="1000000" d="1000000"/>
-                    </am3d:scale>
-                    <am3d:rot ay="5400000"/>
-                    <am3d:postTrans dx="0" dy="0" dz="0"/>
-                  </am3d:trans>
-                  <am3d:raster rName="Office3DRenderer" rVer="16.0.8326">
-                    <am3d:blip r:embed="rId3"/>
-                  </am3d:raster>
-                  <am3d:objViewport viewportSz="4275869"/>
-                  <am3d:ambientLight>
-                    <am3d:clr>
-                      <a:scrgbClr r="50000" g="50000" b="50000"/>
-                    </am3d:clr>
-                    <am3d:illuminance n="500000" d="1000000"/>
-                  </am3d:ambientLight>
-                  <am3d:ptLight rad="0">
-                    <am3d:clr>
-                      <a:scrgbClr r="100000" g="75000" b="50000"/>
-                    </am3d:clr>
-                    <am3d:intensity n="9765625" d="1000000"/>
-                    <am3d:pos x="21959998" y="70920001" z="16344003"/>
-                  </am3d:ptLight>
-                  <am3d:ptLight rad="0">
-                    <am3d:clr>
-                      <a:scrgbClr r="40000" g="60000" b="95000"/>
-                    </am3d:clr>
-                    <am3d:intensity n="12250000" d="1000000"/>
-                    <am3d:pos x="-37964106" y="51130435" z="57631972"/>
-                  </am3d:ptLight>
-                  <am3d:ptLight rad="0">
-                    <am3d:clr>
-                      <a:scrgbClr r="86837" g="72700" b="100000"/>
-                    </am3d:clr>
-                    <am3d:intensity n="3125000" d="1000000"/>
-                    <am3d:pos x="-37739122" y="58056624" z="-34769649"/>
-                  </am3d:ptLight>
-                </am3d:model3d>
-              </a:graphicData>
-            </a:graphic>
-          </p:graphicFrame>
-        </mc:Choice>
-        <mc:Fallback>
-          <p:pic>
-            <p:nvPicPr>
-              <p:cNvPr id="2" name="3D Model 1" descr="Public Bus">
-                <a:extLst>
-                  <a:ext uri="{FF2B5EF4-FFF2-40B4-BE49-F238E27FC236}">
-                    <a16:creationId xmlns:a16="http://schemas.microsoft.com/office/drawing/2014/main" id="{E108DE42-EEE5-11AE-8AF9-0944F403A5E5}"/>
-                  </a:ext>
-                </a:extLst>
-              </p:cNvPr>
-              <p:cNvPicPr>
-                <a:picLocks noGrp="1" noRot="1" noChangeAspect="1" noMove="1" noResize="1" noEditPoints="1" noAdjustHandles="1" noChangeArrowheads="1" noChangeShapeType="1" noCrop="1"/>
-              </p:cNvPicPr>
-              <p:nvPr/>
-            </p:nvPicPr>
-            <p:blipFill>
-              <a:blip r:embed="rId3"/>
-              <a:stretch>
-                <a:fillRect/>
-              </a:stretch>
-            </p:blipFill>
-            <p:spPr>
-              <a:xfrm>
-                <a:off x="-3999664" y="5580148"/>
-                <a:ext cx="3999664" cy="1277852"/>
-              </a:xfrm>
-              <a:prstGeom prst="rect">
-                <a:avLst/>
-              </a:prstGeom>
-            </p:spPr>
-          </p:pic>
-        </mc:Fallback>
-      </mc:AlternateContent>
-      <mc:AlternateContent xmlns:mc="http://schemas.openxmlformats.org/markup-compatibility/2006">
-        <mc:Choice xmlns:am3d="http://schemas.microsoft.com/office/drawing/2017/model3d" Requires="am3d">
-          <p:graphicFrame>
-            <p:nvGraphicFramePr>
-              <p:cNvPr id="4" name="3D Model 3" descr="Public Bus">
-                <a:extLst>
-                  <a:ext uri="{FF2B5EF4-FFF2-40B4-BE49-F238E27FC236}">
-                    <a16:creationId xmlns:a16="http://schemas.microsoft.com/office/drawing/2014/main" id="{C5BCADDD-44CA-A296-4A9F-02965FE32C21}"/>
-                  </a:ext>
-                </a:extLst>
-              </p:cNvPr>
-              <p:cNvGraphicFramePr>
-                <a:graphicFrameLocks noChangeAspect="1"/>
-              </p:cNvGraphicFramePr>
-              <p:nvPr>
-                <p:extLst>
-                  <p:ext uri="{D42A27DB-BD31-4B8C-83A1-F6EECF244321}">
-                    <p14:modId xmlns:p14="http://schemas.microsoft.com/office/powerpoint/2010/main" val="1593270478"/>
-                  </p:ext>
-                </p:extLst>
-              </p:nvPr>
-            </p:nvGraphicFramePr>
-            <p:xfrm>
-              <a:off x="-3999664" y="5580148"/>
-              <a:ext cx="3999664" cy="1277852"/>
-            </p:xfrm>
-            <a:graphic>
-              <a:graphicData uri="http://schemas.microsoft.com/office/drawing/2017/model3d">
-                <am3d:model3d r:embed="rId2">
-                  <am3d:spPr>
-                    <a:xfrm>
-                      <a:off x="0" y="0"/>
-                      <a:ext cx="3999664" cy="1277852"/>
-                    </a:xfrm>
-                    <a:prstGeom prst="rect">
-                      <a:avLst/>
-                    </a:prstGeom>
-                  </am3d:spPr>
-                  <am3d:camera>
-                    <am3d:pos x="0" y="0" z="51119037"/>
-                    <am3d:up dx="0" dy="36000000" dz="0"/>
-                    <am3d:lookAt x="0" y="0" z="0"/>
-                    <am3d:perspective fov="2700000"/>
-                  </am3d:camera>
-                  <am3d:trans>
-                    <am3d:meterPerModelUnit n="149750" d="1000000"/>
-                    <am3d:preTrans dx="0" dy="-5693451" dz="0"/>
-                    <am3d:scale>
-                      <am3d:sx n="1000000" d="1000000"/>
-                      <am3d:sy n="1000000" d="1000000"/>
-                      <am3d:sz n="1000000" d="1000000"/>
-                    </am3d:scale>
-                    <am3d:rot ay="5400000"/>
-                    <am3d:postTrans dx="0" dy="0" dz="0"/>
-                  </am3d:trans>
-                  <am3d:raster rName="Office3DRenderer" rVer="16.0.8326">
-                    <am3d:blip r:embed="rId3"/>
-                  </am3d:raster>
-                  <am3d:objViewport viewportSz="4275869"/>
-                  <am3d:ambientLight>
-                    <am3d:clr>
-                      <a:scrgbClr r="50000" g="50000" b="50000"/>
-                    </am3d:clr>
-                    <am3d:illuminance n="500000" d="1000000"/>
-                  </am3d:ambientLight>
-                  <am3d:ptLight rad="0">
-                    <am3d:clr>
-                      <a:scrgbClr r="100000" g="75000" b="50000"/>
-                    </am3d:clr>
-                    <am3d:intensity n="9765625" d="1000000"/>
-                    <am3d:pos x="21959998" y="70920001" z="16344003"/>
-                  </am3d:ptLight>
-                  <am3d:ptLight rad="0">
-                    <am3d:clr>
-                      <a:scrgbClr r="40000" g="60000" b="95000"/>
-                    </am3d:clr>
-                    <am3d:intensity n="12250000" d="1000000"/>
-                    <am3d:pos x="-37964106" y="51130435" z="57631972"/>
-                  </am3d:ptLight>
-                  <am3d:ptLight rad="0">
-                    <am3d:clr>
-                      <a:scrgbClr r="86837" g="72700" b="100000"/>
-                    </am3d:clr>
-                    <am3d:intensity n="3125000" d="1000000"/>
-                    <am3d:pos x="-37739122" y="58056624" z="-34769649"/>
-                  </am3d:ptLight>
-                </am3d:model3d>
-              </a:graphicData>
-            </a:graphic>
-          </p:graphicFrame>
-        </mc:Choice>
-        <mc:Fallback>
-          <p:pic>
-            <p:nvPicPr>
-              <p:cNvPr id="4" name="3D Model 3" descr="Public Bus">
-                <a:extLst>
-                  <a:ext uri="{FF2B5EF4-FFF2-40B4-BE49-F238E27FC236}">
-                    <a16:creationId xmlns:a16="http://schemas.microsoft.com/office/drawing/2014/main" id="{C5BCADDD-44CA-A296-4A9F-02965FE32C21}"/>
-                  </a:ext>
-                </a:extLst>
-              </p:cNvPr>
-              <p:cNvPicPr>
-                <a:picLocks noGrp="1" noRot="1" noChangeAspect="1" noMove="1" noResize="1" noEditPoints="1" noAdjustHandles="1" noChangeArrowheads="1" noChangeShapeType="1" noCrop="1"/>
-              </p:cNvPicPr>
-              <p:nvPr/>
-            </p:nvPicPr>
-            <p:blipFill>
-              <a:blip r:embed="rId3"/>
-              <a:stretch>
-                <a:fillRect/>
-              </a:stretch>
-            </p:blipFill>
-            <p:spPr>
-              <a:xfrm>
-                <a:off x="-3999664" y="5580148"/>
-                <a:ext cx="3999664" cy="1277852"/>
-              </a:xfrm>
-              <a:prstGeom prst="rect">
-                <a:avLst/>
-              </a:prstGeom>
-            </p:spPr>
-          </p:pic>
-        </mc:Fallback>
-      </mc:AlternateContent>
-      <mc:AlternateContent xmlns:mc="http://schemas.openxmlformats.org/markup-compatibility/2006">
-        <mc:Choice xmlns:am3d="http://schemas.microsoft.com/office/drawing/2017/model3d" Requires="am3d">
-          <p:graphicFrame>
-            <p:nvGraphicFramePr>
-              <p:cNvPr id="5" name="3D Model 4" descr="Public Bus">
-                <a:extLst>
-                  <a:ext uri="{FF2B5EF4-FFF2-40B4-BE49-F238E27FC236}">
-                    <a16:creationId xmlns:a16="http://schemas.microsoft.com/office/drawing/2014/main" id="{E388A287-0C5C-9115-0631-C8D0E8E24994}"/>
-                  </a:ext>
-                </a:extLst>
-              </p:cNvPr>
-              <p:cNvGraphicFramePr>
-                <a:graphicFrameLocks noChangeAspect="1"/>
-              </p:cNvGraphicFramePr>
-              <p:nvPr>
-                <p:extLst>
-                  <p:ext uri="{D42A27DB-BD31-4B8C-83A1-F6EECF244321}">
-                    <p14:modId xmlns:p14="http://schemas.microsoft.com/office/powerpoint/2010/main" val="2344365634"/>
-                  </p:ext>
-                </p:extLst>
-              </p:nvPr>
-            </p:nvGraphicFramePr>
-            <p:xfrm>
-              <a:off x="-3999664" y="5580148"/>
-              <a:ext cx="3999664" cy="1277852"/>
-            </p:xfrm>
-            <a:graphic>
-              <a:graphicData uri="http://schemas.microsoft.com/office/drawing/2017/model3d">
-                <am3d:model3d r:embed="rId2">
-                  <am3d:spPr>
-                    <a:xfrm>
-                      <a:off x="0" y="0"/>
-                      <a:ext cx="3999664" cy="1277852"/>
-                    </a:xfrm>
-                    <a:prstGeom prst="rect">
-                      <a:avLst/>
-                    </a:prstGeom>
-                  </am3d:spPr>
-                  <am3d:camera>
-                    <am3d:pos x="0" y="0" z="51119037"/>
-                    <am3d:up dx="0" dy="36000000" dz="0"/>
-                    <am3d:lookAt x="0" y="0" z="0"/>
-                    <am3d:perspective fov="2700000"/>
-                  </am3d:camera>
-                  <am3d:trans>
-                    <am3d:meterPerModelUnit n="149750" d="1000000"/>
-                    <am3d:preTrans dx="0" dy="-5693451" dz="0"/>
-                    <am3d:scale>
-                      <am3d:sx n="1000000" d="1000000"/>
-                      <am3d:sy n="1000000" d="1000000"/>
-                      <am3d:sz n="1000000" d="1000000"/>
-                    </am3d:scale>
-                    <am3d:rot ay="5400000"/>
-                    <am3d:postTrans dx="0" dy="0" dz="0"/>
-                  </am3d:trans>
-                  <am3d:raster rName="Office3DRenderer" rVer="16.0.8326">
-                    <am3d:blip r:embed="rId3"/>
-                  </am3d:raster>
-                  <am3d:objViewport viewportSz="4275869"/>
-                  <am3d:ambientLight>
-                    <am3d:clr>
-                      <a:scrgbClr r="50000" g="50000" b="50000"/>
-                    </am3d:clr>
-                    <am3d:illuminance n="500000" d="1000000"/>
-                  </am3d:ambientLight>
-                  <am3d:ptLight rad="0">
-                    <am3d:clr>
-                      <a:scrgbClr r="100000" g="75000" b="50000"/>
-                    </am3d:clr>
-                    <am3d:intensity n="9765625" d="1000000"/>
-                    <am3d:pos x="21959998" y="70920001" z="16344003"/>
-                  </am3d:ptLight>
-                  <am3d:ptLight rad="0">
-                    <am3d:clr>
-                      <a:scrgbClr r="40000" g="60000" b="95000"/>
-                    </am3d:clr>
-                    <am3d:intensity n="12250000" d="1000000"/>
-                    <am3d:pos x="-37964106" y="51130435" z="57631972"/>
-                  </am3d:ptLight>
-                  <am3d:ptLight rad="0">
-                    <am3d:clr>
-                      <a:scrgbClr r="86837" g="72700" b="100000"/>
-                    </am3d:clr>
-                    <am3d:intensity n="3125000" d="1000000"/>
-                    <am3d:pos x="-37739122" y="58056624" z="-34769649"/>
-                  </am3d:ptLight>
-                </am3d:model3d>
-              </a:graphicData>
-            </a:graphic>
-          </p:graphicFrame>
-        </mc:Choice>
-        <mc:Fallback>
-          <p:pic>
-            <p:nvPicPr>
-              <p:cNvPr id="5" name="3D Model 4" descr="Public Bus">
-                <a:extLst>
-                  <a:ext uri="{FF2B5EF4-FFF2-40B4-BE49-F238E27FC236}">
-                    <a16:creationId xmlns:a16="http://schemas.microsoft.com/office/drawing/2014/main" id="{E388A287-0C5C-9115-0631-C8D0E8E24994}"/>
-                  </a:ext>
-                </a:extLst>
-              </p:cNvPr>
-              <p:cNvPicPr>
-                <a:picLocks noGrp="1" noRot="1" noChangeAspect="1" noMove="1" noResize="1" noEditPoints="1" noAdjustHandles="1" noChangeArrowheads="1" noChangeShapeType="1" noCrop="1"/>
-              </p:cNvPicPr>
-              <p:nvPr/>
-            </p:nvPicPr>
-            <p:blipFill>
-              <a:blip r:embed="rId3"/>
-              <a:stretch>
-                <a:fillRect/>
-              </a:stretch>
-            </p:blipFill>
-            <p:spPr>
-              <a:xfrm>
-                <a:off x="-3999664" y="5580148"/>
-                <a:ext cx="3999664" cy="1277852"/>
-              </a:xfrm>
-              <a:prstGeom prst="rect">
-                <a:avLst/>
-              </a:prstGeom>
-            </p:spPr>
-          </p:pic>
-        </mc:Fallback>
-      </mc:AlternateContent>
-      <mc:AlternateContent xmlns:mc="http://schemas.openxmlformats.org/markup-compatibility/2006">
-        <mc:Choice xmlns:am3d="http://schemas.microsoft.com/office/drawing/2017/model3d" Requires="am3d">
-          <p:graphicFrame>
-            <p:nvGraphicFramePr>
-              <p:cNvPr id="6" name="3D Model 5" descr="Public Bus">
-                <a:extLst>
-                  <a:ext uri="{FF2B5EF4-FFF2-40B4-BE49-F238E27FC236}">
-                    <a16:creationId xmlns:a16="http://schemas.microsoft.com/office/drawing/2014/main" id="{4FA3FE21-66E3-BE24-C0D5-C94E16087358}"/>
-                  </a:ext>
-                </a:extLst>
-              </p:cNvPr>
-              <p:cNvGraphicFramePr>
-                <a:graphicFrameLocks noChangeAspect="1"/>
-              </p:cNvGraphicFramePr>
-              <p:nvPr>
-                <p:extLst>
-                  <p:ext uri="{D42A27DB-BD31-4B8C-83A1-F6EECF244321}">
-                    <p14:modId xmlns:p14="http://schemas.microsoft.com/office/powerpoint/2010/main" val="812997452"/>
-                  </p:ext>
-                </p:extLst>
-              </p:nvPr>
-            </p:nvGraphicFramePr>
-            <p:xfrm>
-              <a:off x="-3999664" y="5580148"/>
-              <a:ext cx="3999664" cy="1277852"/>
-            </p:xfrm>
-            <a:graphic>
-              <a:graphicData uri="http://schemas.microsoft.com/office/drawing/2017/model3d">
-                <am3d:model3d r:embed="rId2">
-                  <am3d:spPr>
-                    <a:xfrm>
-                      <a:off x="0" y="0"/>
-                      <a:ext cx="3999664" cy="1277852"/>
-                    </a:xfrm>
-                    <a:prstGeom prst="rect">
-                      <a:avLst/>
-                    </a:prstGeom>
-                  </am3d:spPr>
-                  <am3d:camera>
-                    <am3d:pos x="0" y="0" z="51119037"/>
-                    <am3d:up dx="0" dy="36000000" dz="0"/>
-                    <am3d:lookAt x="0" y="0" z="0"/>
-                    <am3d:perspective fov="2700000"/>
-                  </am3d:camera>
-                  <am3d:trans>
-                    <am3d:meterPerModelUnit n="149750" d="1000000"/>
-                    <am3d:preTrans dx="0" dy="-5693451" dz="0"/>
-                    <am3d:scale>
-                      <am3d:sx n="1000000" d="1000000"/>
-                      <am3d:sy n="1000000" d="1000000"/>
-                      <am3d:sz n="1000000" d="1000000"/>
-                    </am3d:scale>
-                    <am3d:rot ay="5400000"/>
-                    <am3d:postTrans dx="0" dy="0" dz="0"/>
-                  </am3d:trans>
-                  <am3d:raster rName="Office3DRenderer" rVer="16.0.8326">
-                    <am3d:blip r:embed="rId3"/>
-                  </am3d:raster>
-                  <am3d:objViewport viewportSz="4275869"/>
-                  <am3d:ambientLight>
-                    <am3d:clr>
-                      <a:scrgbClr r="50000" g="50000" b="50000"/>
-                    </am3d:clr>
-                    <am3d:illuminance n="500000" d="1000000"/>
-                  </am3d:ambientLight>
-                  <am3d:ptLight rad="0">
-                    <am3d:clr>
-                      <a:scrgbClr r="100000" g="75000" b="50000"/>
-                    </am3d:clr>
-                    <am3d:intensity n="9765625" d="1000000"/>
-                    <am3d:pos x="21959998" y="70920001" z="16344003"/>
-                  </am3d:ptLight>
-                  <am3d:ptLight rad="0">
-                    <am3d:clr>
-                      <a:scrgbClr r="40000" g="60000" b="95000"/>
-                    </am3d:clr>
-                    <am3d:intensity n="12250000" d="1000000"/>
-                    <am3d:pos x="-37964106" y="51130435" z="57631972"/>
-                  </am3d:ptLight>
-                  <am3d:ptLight rad="0">
-                    <am3d:clr>
-                      <a:scrgbClr r="86837" g="72700" b="100000"/>
-                    </am3d:clr>
-                    <am3d:intensity n="3125000" d="1000000"/>
-                    <am3d:pos x="-37739122" y="58056624" z="-34769649"/>
-                  </am3d:ptLight>
-                </am3d:model3d>
-              </a:graphicData>
-            </a:graphic>
-          </p:graphicFrame>
-        </mc:Choice>
-        <mc:Fallback>
-          <p:pic>
-            <p:nvPicPr>
-              <p:cNvPr id="6" name="3D Model 5" descr="Public Bus">
-                <a:extLst>
-                  <a:ext uri="{FF2B5EF4-FFF2-40B4-BE49-F238E27FC236}">
-                    <a16:creationId xmlns:a16="http://schemas.microsoft.com/office/drawing/2014/main" id="{4FA3FE21-66E3-BE24-C0D5-C94E16087358}"/>
-                  </a:ext>
-                </a:extLst>
-              </p:cNvPr>
-              <p:cNvPicPr>
-                <a:picLocks noGrp="1" noRot="1" noChangeAspect="1" noMove="1" noResize="1" noEditPoints="1" noAdjustHandles="1" noChangeArrowheads="1" noChangeShapeType="1" noCrop="1"/>
-              </p:cNvPicPr>
-              <p:nvPr/>
-            </p:nvPicPr>
-            <p:blipFill>
-              <a:blip r:embed="rId3"/>
-              <a:stretch>
-                <a:fillRect/>
-              </a:stretch>
-            </p:blipFill>
-            <p:spPr>
-              <a:xfrm>
-                <a:off x="-3999664" y="5580148"/>
-                <a:ext cx="3999664" cy="1277852"/>
-              </a:xfrm>
-              <a:prstGeom prst="rect">
-                <a:avLst/>
-              </a:prstGeom>
-            </p:spPr>
-          </p:pic>
-        </mc:Fallback>
-      </mc:AlternateContent>
-    </p:spTree>
-    <p:extLst>
-      <p:ext uri="{BB962C8B-B14F-4D97-AF65-F5344CB8AC3E}">
-        <p14:creationId xmlns:p14="http://schemas.microsoft.com/office/powerpoint/2010/main" val="4150258020"/>
-      </p:ext>
-    </p:extLst>
-  </p:cSld>
-  <p:clrMapOvr>
-    <a:masterClrMapping/>
-  </p:clrMapOvr>
-  <mc:AlternateContent xmlns:mc="http://schemas.openxmlformats.org/markup-compatibility/2006" xmlns:p14="http://schemas.microsoft.com/office/powerpoint/2010/main">
-    <mc:Choice Requires="p14">
-      <p:transition p14:dur="10"/>
-    </mc:Choice>
-    <mc:Fallback xmlns="">
-      <p:transition/>
-    </mc:Fallback>
-  </mc:AlternateContent>
-  <p:timing>
-    <p:tnLst>
-      <p:par>
-        <p:cTn id="1" dur="indefinite" restart="never" nodeType="tmRoot">
-          <p:childTnLst>
-            <p:seq concurrent="1" nextAc="seek">
-              <p:cTn id="2" dur="indefinite" nodeType="mainSeq">
-                <p:childTnLst>
-                  <p:par>
-                    <p:cTn id="3" fill="hold">
-                      <p:stCondLst>
-                        <p:cond delay="indefinite"/>
-                        <p:cond evt="onBegin" delay="0">
-                          <p:tn val="2"/>
-                        </p:cond>
-                      </p:stCondLst>
-                      <p:childTnLst>
-                        <p:par>
-                          <p:cTn id="4" fill="hold">
-                            <p:stCondLst>
-                              <p:cond delay="0"/>
-                            </p:stCondLst>
-                            <p:childTnLst>
-                              <p:par>
-                                <p:cTn id="5" presetID="63" presetClass="path" presetSubtype="0" repeatCount="indefinite" fill="hold" nodeType="withEffect">
-                                  <p:stCondLst>
-                                    <p:cond delay="0"/>
-                                  </p:stCondLst>
-                                  <p:childTnLst>
-                                    <p:animMotion origin="layout" path="M 2.29167E-6 -2.96296E-6 L 1.33125 -2.96296E-6 " pathEditMode="relative" rAng="0" ptsTypes="AA">
-                                      <p:cBhvr>
-                                        <p:cTn id="6" dur="3000" fill="hold"/>
-                                        <p:tgtEl>
-                                          <p:spTgt spid="2"/>
-                                        </p:tgtEl>
-                                        <p:attrNameLst>
-                                          <p:attrName>ppt_x</p:attrName>
-                                          <p:attrName>ppt_y</p:attrName>
-                                        </p:attrNameLst>
-                                      </p:cBhvr>
-                                      <p:rCtr x="66562" y="0"/>
-                                    </p:animMotion>
-                                  </p:childTnLst>
-                                </p:cTn>
-                              </p:par>
-                              <p:par>
-                                <p:cTn id="7" presetID="63" presetClass="path" presetSubtype="0" repeatCount="indefinite" fill="hold" nodeType="withEffect">
-                                  <p:stCondLst>
-                                    <p:cond delay="1500"/>
-                                  </p:stCondLst>
-                                  <p:childTnLst>
-                                    <p:animMotion origin="layout" path="M 2.29167E-6 -2.96296E-6 L 1.33125 -2.96296E-6 " pathEditMode="relative" rAng="0" ptsTypes="AA">
-                                      <p:cBhvr>
-                                        <p:cTn id="8" dur="3000" fill="hold"/>
-                                        <p:tgtEl>
-                                          <p:spTgt spid="4"/>
-                                        </p:tgtEl>
-                                        <p:attrNameLst>
-                                          <p:attrName>ppt_x</p:attrName>
-                                          <p:attrName>ppt_y</p:attrName>
-                                        </p:attrNameLst>
-                                      </p:cBhvr>
-                                      <p:rCtr x="66562" y="0"/>
-                                    </p:animMotion>
-                                  </p:childTnLst>
-                                </p:cTn>
-                              </p:par>
-                              <p:par>
-                                <p:cTn id="9" presetID="63" presetClass="path" presetSubtype="0" repeatCount="indefinite" fill="hold" nodeType="withEffect">
-                                  <p:stCondLst>
-                                    <p:cond delay="2250"/>
-                                  </p:stCondLst>
-                                  <p:childTnLst>
-                                    <p:animMotion origin="layout" path="M 2.29167E-6 -2.96296E-6 L 1.33125 -2.96296E-6 " pathEditMode="relative" rAng="0" ptsTypes="AA">
-                                      <p:cBhvr>
-                                        <p:cTn id="10" dur="3000" fill="hold"/>
-                                        <p:tgtEl>
-                                          <p:spTgt spid="5"/>
-                                        </p:tgtEl>
-                                        <p:attrNameLst>
-                                          <p:attrName>ppt_x</p:attrName>
-                                          <p:attrName>ppt_y</p:attrName>
-                                        </p:attrNameLst>
-                                      </p:cBhvr>
-                                      <p:rCtr x="66562" y="0"/>
-                                    </p:animMotion>
-                                  </p:childTnLst>
-                                </p:cTn>
-                              </p:par>
-                              <p:par>
-                                <p:cTn id="11" presetID="63" presetClass="path" presetSubtype="0" repeatCount="indefinite" fill="hold" nodeType="withEffect">
-                                  <p:stCondLst>
-                                    <p:cond delay="750"/>
-                                  </p:stCondLst>
-                                  <p:childTnLst>
-                                    <p:animMotion origin="layout" path="M 2.29167E-6 -2.96296E-6 L 1.33125 -2.96296E-6 " pathEditMode="relative" rAng="0" ptsTypes="AA">
-                                      <p:cBhvr>
-                                        <p:cTn id="12" dur="3000" fill="hold"/>
-                                        <p:tgtEl>
-                                          <p:spTgt spid="6"/>
-                                        </p:tgtEl>
-                                        <p:attrNameLst>
-                                          <p:attrName>ppt_x</p:attrName>
-                                          <p:attrName>ppt_y</p:attrName>
-                                        </p:attrNameLst>
-                                      </p:cBhvr>
-                                      <p:rCtr x="66562" y="0"/>
-                                    </p:animMotion>
-                                  </p:childTnLst>
-                                </p:cTn>
-                              </p:par>
-                            </p:childTnLst>
-                          </p:cTn>
-                        </p:par>
-                      </p:childTnLst>
-                    </p:cTn>
-                  </p:par>
-                </p:childTnLst>
-              </p:cTn>
-              <p:prevCondLst>
-                <p:cond evt="onPrev" delay="0">
-                  <p:tgtEl>
-                    <p:sldTgt/>
-                  </p:tgtEl>
-                </p:cond>
-              </p:prevCondLst>
-              <p:nextCondLst>
-                <p:cond evt="onNext" delay="0">
-                  <p:tgtEl>
-                    <p:sldTgt/>
-                  </p:tgtEl>
-                </p:cond>
-              </p:nextCondLst>
-            </p:seq>
-          </p:childTnLst>
-        </p:cTn>
-      </p:par>
-    </p:tnLst>
-  </p:timing>
 </p:sld>
 </file>
 

--- a/documentacion/Presentation1.pptx
+++ b/documentacion/Presentation1.pptx
@@ -4324,7 +4324,7 @@
         <p:cNvPr id="1" name="">
           <a:extLst>
             <a:ext uri="{FF2B5EF4-FFF2-40B4-BE49-F238E27FC236}">
-              <a16:creationId xmlns:a16="http://schemas.microsoft.com/office/drawing/2014/main" id="{70CB2267-382D-7F65-DCE2-786037F196E6}"/>
+              <a16:creationId xmlns:a16="http://schemas.microsoft.com/office/drawing/2014/main" id="{52FDAE8E-8EF8-9ECD-A87A-E4F84F3F0E34}"/>
             </a:ext>
           </a:extLst>
         </p:cNvPr>
@@ -4339,10 +4339,923 @@
           <a:chExt cx="0" cy="0"/>
         </a:xfrm>
       </p:grpSpPr>
+      <p:sp>
+        <p:nvSpPr>
+          <p:cNvPr id="6" name="Rectangle 5">
+            <a:extLst>
+              <a:ext uri="{FF2B5EF4-FFF2-40B4-BE49-F238E27FC236}">
+                <a16:creationId xmlns:a16="http://schemas.microsoft.com/office/drawing/2014/main" id="{5DD45CF8-1525-2865-5F27-B7E6190DCB9F}"/>
+              </a:ext>
+            </a:extLst>
+          </p:cNvPr>
+          <p:cNvSpPr/>
+          <p:nvPr/>
+        </p:nvSpPr>
+        <p:spPr>
+          <a:xfrm flipH="1">
+            <a:off x="10752000" y="-1"/>
+            <a:ext cx="1440000" cy="6858000"/>
+          </a:xfrm>
+          <a:prstGeom prst="rect">
+            <a:avLst/>
+          </a:prstGeom>
+          <a:solidFill>
+            <a:srgbClr val="1181C3"/>
+          </a:solidFill>
+          <a:ln>
+            <a:noFill/>
+          </a:ln>
+        </p:spPr>
+        <p:style>
+          <a:lnRef idx="2">
+            <a:schemeClr val="accent1">
+              <a:shade val="15000"/>
+            </a:schemeClr>
+          </a:lnRef>
+          <a:fillRef idx="1">
+            <a:schemeClr val="accent1"/>
+          </a:fillRef>
+          <a:effectRef idx="0">
+            <a:schemeClr val="accent1"/>
+          </a:effectRef>
+          <a:fontRef idx="minor">
+            <a:schemeClr val="lt1"/>
+          </a:fontRef>
+        </p:style>
+        <p:txBody>
+          <a:bodyPr rtlCol="0" anchor="ctr"/>
+          <a:lstStyle/>
+          <a:p>
+            <a:pPr algn="ctr"/>
+            <a:endParaRPr lang="es-MX"/>
+          </a:p>
+        </p:txBody>
+      </p:sp>
+      <p:sp>
+        <p:nvSpPr>
+          <p:cNvPr id="19" name="Isosceles Triangle 18">
+            <a:extLst>
+              <a:ext uri="{FF2B5EF4-FFF2-40B4-BE49-F238E27FC236}">
+                <a16:creationId xmlns:a16="http://schemas.microsoft.com/office/drawing/2014/main" id="{54750404-B818-A54F-6BA1-115FEA242B78}"/>
+              </a:ext>
+            </a:extLst>
+          </p:cNvPr>
+          <p:cNvSpPr/>
+          <p:nvPr/>
+        </p:nvSpPr>
+        <p:spPr>
+          <a:xfrm>
+            <a:off x="9312000" y="3977999"/>
+            <a:ext cx="2880000" cy="2880000"/>
+          </a:xfrm>
+          <a:prstGeom prst="triangle">
+            <a:avLst>
+              <a:gd name="adj" fmla="val 100000"/>
+            </a:avLst>
+          </a:prstGeom>
+          <a:solidFill>
+            <a:srgbClr val="1181C3"/>
+          </a:solidFill>
+          <a:ln>
+            <a:noFill/>
+          </a:ln>
+        </p:spPr>
+        <p:style>
+          <a:lnRef idx="2">
+            <a:schemeClr val="accent1">
+              <a:shade val="15000"/>
+            </a:schemeClr>
+          </a:lnRef>
+          <a:fillRef idx="1">
+            <a:schemeClr val="accent1"/>
+          </a:fillRef>
+          <a:effectRef idx="0">
+            <a:schemeClr val="accent1"/>
+          </a:effectRef>
+          <a:fontRef idx="minor">
+            <a:schemeClr val="lt1"/>
+          </a:fontRef>
+        </p:style>
+        <p:txBody>
+          <a:bodyPr rtlCol="0" anchor="ctr"/>
+          <a:lstStyle/>
+          <a:p>
+            <a:pPr algn="ctr"/>
+            <a:endParaRPr lang="es-MX"/>
+          </a:p>
+        </p:txBody>
+      </p:sp>
+      <p:sp>
+        <p:nvSpPr>
+          <p:cNvPr id="20" name="Isosceles Triangle 19">
+            <a:extLst>
+              <a:ext uri="{FF2B5EF4-FFF2-40B4-BE49-F238E27FC236}">
+                <a16:creationId xmlns:a16="http://schemas.microsoft.com/office/drawing/2014/main" id="{4EEA9E84-DC34-E34B-75EF-3F9D772ED688}"/>
+              </a:ext>
+            </a:extLst>
+          </p:cNvPr>
+          <p:cNvSpPr/>
+          <p:nvPr/>
+        </p:nvSpPr>
+        <p:spPr>
+          <a:xfrm flipV="1">
+            <a:off x="9312000" y="-1"/>
+            <a:ext cx="2880000" cy="2880000"/>
+          </a:xfrm>
+          <a:prstGeom prst="triangle">
+            <a:avLst>
+              <a:gd name="adj" fmla="val 100000"/>
+            </a:avLst>
+          </a:prstGeom>
+          <a:solidFill>
+            <a:srgbClr val="1181C3"/>
+          </a:solidFill>
+          <a:ln>
+            <a:noFill/>
+          </a:ln>
+        </p:spPr>
+        <p:style>
+          <a:lnRef idx="2">
+            <a:schemeClr val="accent1">
+              <a:shade val="15000"/>
+            </a:schemeClr>
+          </a:lnRef>
+          <a:fillRef idx="1">
+            <a:schemeClr val="accent1"/>
+          </a:fillRef>
+          <a:effectRef idx="0">
+            <a:schemeClr val="accent1"/>
+          </a:effectRef>
+          <a:fontRef idx="minor">
+            <a:schemeClr val="lt1"/>
+          </a:fontRef>
+        </p:style>
+        <p:txBody>
+          <a:bodyPr rtlCol="0" anchor="ctr"/>
+          <a:lstStyle/>
+          <a:p>
+            <a:pPr algn="ctr"/>
+            <a:endParaRPr lang="es-MX"/>
+          </a:p>
+        </p:txBody>
+      </p:sp>
+      <p:sp>
+        <p:nvSpPr>
+          <p:cNvPr id="4" name="Rectangle 3">
+            <a:extLst>
+              <a:ext uri="{FF2B5EF4-FFF2-40B4-BE49-F238E27FC236}">
+                <a16:creationId xmlns:a16="http://schemas.microsoft.com/office/drawing/2014/main" id="{7E8224B8-5166-F342-15E6-5C3ADC4DB166}"/>
+              </a:ext>
+            </a:extLst>
+          </p:cNvPr>
+          <p:cNvSpPr/>
+          <p:nvPr/>
+        </p:nvSpPr>
+        <p:spPr>
+          <a:xfrm>
+            <a:off x="0" y="0"/>
+            <a:ext cx="1440000" cy="6858000"/>
+          </a:xfrm>
+          <a:prstGeom prst="rect">
+            <a:avLst/>
+          </a:prstGeom>
+          <a:solidFill>
+            <a:srgbClr val="ED7237"/>
+          </a:solidFill>
+          <a:ln>
+            <a:noFill/>
+          </a:ln>
+        </p:spPr>
+        <p:style>
+          <a:lnRef idx="2">
+            <a:schemeClr val="accent1">
+              <a:shade val="15000"/>
+            </a:schemeClr>
+          </a:lnRef>
+          <a:fillRef idx="1">
+            <a:schemeClr val="accent1"/>
+          </a:fillRef>
+          <a:effectRef idx="0">
+            <a:schemeClr val="accent1"/>
+          </a:effectRef>
+          <a:fontRef idx="minor">
+            <a:schemeClr val="lt1"/>
+          </a:fontRef>
+        </p:style>
+        <p:txBody>
+          <a:bodyPr rtlCol="0" anchor="ctr"/>
+          <a:lstStyle/>
+          <a:p>
+            <a:pPr algn="ctr"/>
+            <a:endParaRPr lang="es-MX"/>
+          </a:p>
+        </p:txBody>
+      </p:sp>
+      <p:sp>
+        <p:nvSpPr>
+          <p:cNvPr id="21" name="Isosceles Triangle 20">
+            <a:extLst>
+              <a:ext uri="{FF2B5EF4-FFF2-40B4-BE49-F238E27FC236}">
+                <a16:creationId xmlns:a16="http://schemas.microsoft.com/office/drawing/2014/main" id="{575C3C4F-5753-7E24-8AA2-85F1AE45CE85}"/>
+              </a:ext>
+            </a:extLst>
+          </p:cNvPr>
+          <p:cNvSpPr/>
+          <p:nvPr/>
+        </p:nvSpPr>
+        <p:spPr>
+          <a:xfrm flipH="1">
+            <a:off x="0" y="3977999"/>
+            <a:ext cx="2880000" cy="2880000"/>
+          </a:xfrm>
+          <a:prstGeom prst="triangle">
+            <a:avLst>
+              <a:gd name="adj" fmla="val 100000"/>
+            </a:avLst>
+          </a:prstGeom>
+          <a:solidFill>
+            <a:srgbClr val="ED7237"/>
+          </a:solidFill>
+          <a:ln>
+            <a:noFill/>
+          </a:ln>
+        </p:spPr>
+        <p:style>
+          <a:lnRef idx="2">
+            <a:schemeClr val="accent1">
+              <a:shade val="15000"/>
+            </a:schemeClr>
+          </a:lnRef>
+          <a:fillRef idx="1">
+            <a:schemeClr val="accent1"/>
+          </a:fillRef>
+          <a:effectRef idx="0">
+            <a:schemeClr val="accent1"/>
+          </a:effectRef>
+          <a:fontRef idx="minor">
+            <a:schemeClr val="lt1"/>
+          </a:fontRef>
+        </p:style>
+        <p:txBody>
+          <a:bodyPr rtlCol="0" anchor="ctr"/>
+          <a:lstStyle/>
+          <a:p>
+            <a:pPr algn="ctr"/>
+            <a:endParaRPr lang="es-MX"/>
+          </a:p>
+        </p:txBody>
+      </p:sp>
+      <p:sp>
+        <p:nvSpPr>
+          <p:cNvPr id="22" name="Isosceles Triangle 21">
+            <a:extLst>
+              <a:ext uri="{FF2B5EF4-FFF2-40B4-BE49-F238E27FC236}">
+                <a16:creationId xmlns:a16="http://schemas.microsoft.com/office/drawing/2014/main" id="{BE2C60F9-8AC7-2ED2-B7E6-E1A83DCB6C8F}"/>
+              </a:ext>
+            </a:extLst>
+          </p:cNvPr>
+          <p:cNvSpPr/>
+          <p:nvPr/>
+        </p:nvSpPr>
+        <p:spPr>
+          <a:xfrm flipH="1" flipV="1">
+            <a:off x="0" y="-1"/>
+            <a:ext cx="2880000" cy="2880000"/>
+          </a:xfrm>
+          <a:prstGeom prst="triangle">
+            <a:avLst>
+              <a:gd name="adj" fmla="val 100000"/>
+            </a:avLst>
+          </a:prstGeom>
+          <a:solidFill>
+            <a:srgbClr val="ED7237"/>
+          </a:solidFill>
+          <a:ln>
+            <a:noFill/>
+          </a:ln>
+        </p:spPr>
+        <p:style>
+          <a:lnRef idx="2">
+            <a:schemeClr val="accent1">
+              <a:shade val="15000"/>
+            </a:schemeClr>
+          </a:lnRef>
+          <a:fillRef idx="1">
+            <a:schemeClr val="accent1"/>
+          </a:fillRef>
+          <a:effectRef idx="0">
+            <a:schemeClr val="accent1"/>
+          </a:effectRef>
+          <a:fontRef idx="minor">
+            <a:schemeClr val="lt1"/>
+          </a:fontRef>
+        </p:style>
+        <p:txBody>
+          <a:bodyPr rtlCol="0" anchor="ctr"/>
+          <a:lstStyle/>
+          <a:p>
+            <a:pPr algn="ctr"/>
+            <a:endParaRPr lang="es-MX"/>
+          </a:p>
+        </p:txBody>
+      </p:sp>
+      <p:grpSp>
+        <p:nvGrpSpPr>
+          <p:cNvPr id="33" name="Group 32">
+            <a:extLst>
+              <a:ext uri="{FF2B5EF4-FFF2-40B4-BE49-F238E27FC236}">
+                <a16:creationId xmlns:a16="http://schemas.microsoft.com/office/drawing/2014/main" id="{FFE3DC20-E9AF-E585-8CF6-44DBE2D3A27A}"/>
+              </a:ext>
+            </a:extLst>
+          </p:cNvPr>
+          <p:cNvGrpSpPr/>
+          <p:nvPr/>
+        </p:nvGrpSpPr>
+        <p:grpSpPr>
+          <a:xfrm>
+            <a:off x="4447515" y="2178495"/>
+            <a:ext cx="3232445" cy="1403007"/>
+            <a:chOff x="4551229" y="1016179"/>
+            <a:chExt cx="3232445" cy="1403007"/>
+          </a:xfrm>
+        </p:grpSpPr>
+        <p:sp>
+          <p:nvSpPr>
+            <p:cNvPr id="17" name="TextBox 16">
+              <a:extLst>
+                <a:ext uri="{FF2B5EF4-FFF2-40B4-BE49-F238E27FC236}">
+                  <a16:creationId xmlns:a16="http://schemas.microsoft.com/office/drawing/2014/main" id="{101A52A8-61F0-2A49-34E0-99687C4C156E}"/>
+                </a:ext>
+              </a:extLst>
+            </p:cNvPr>
+            <p:cNvSpPr txBox="1"/>
+            <p:nvPr/>
+          </p:nvSpPr>
+          <p:spPr>
+            <a:xfrm>
+              <a:off x="4551229" y="1016179"/>
+              <a:ext cx="1119322" cy="1403007"/>
+            </a:xfrm>
+            <a:custGeom>
+              <a:avLst/>
+              <a:gdLst/>
+              <a:ahLst/>
+              <a:cxnLst/>
+              <a:rect l="l" t="t" r="r" b="b"/>
+              <a:pathLst>
+                <a:path w="1119322" h="1403007">
+                  <a:moveTo>
+                    <a:pt x="0" y="0"/>
+                  </a:moveTo>
+                  <a:lnTo>
+                    <a:pt x="535507" y="0"/>
+                  </a:lnTo>
+                  <a:cubicBezTo>
+                    <a:pt x="698591" y="0"/>
+                    <a:pt x="825016" y="40428"/>
+                    <a:pt x="914781" y="121285"/>
+                  </a:cubicBezTo>
+                  <a:cubicBezTo>
+                    <a:pt x="1014825" y="211736"/>
+                    <a:pt x="1064847" y="326512"/>
+                    <a:pt x="1064847" y="465613"/>
+                  </a:cubicBezTo>
+                  <a:cubicBezTo>
+                    <a:pt x="1064847" y="607456"/>
+                    <a:pt x="1002833" y="727028"/>
+                    <a:pt x="878807" y="824331"/>
+                  </a:cubicBezTo>
+                  <a:lnTo>
+                    <a:pt x="1119322" y="1403007"/>
+                  </a:lnTo>
+                  <a:lnTo>
+                    <a:pt x="681461" y="1403007"/>
+                  </a:lnTo>
+                  <a:lnTo>
+                    <a:pt x="478975" y="950756"/>
+                  </a:lnTo>
+                  <a:lnTo>
+                    <a:pt x="478975" y="589982"/>
+                  </a:lnTo>
+                  <a:lnTo>
+                    <a:pt x="511866" y="589982"/>
+                  </a:lnTo>
+                  <a:cubicBezTo>
+                    <a:pt x="599576" y="589982"/>
+                    <a:pt x="643430" y="552295"/>
+                    <a:pt x="643430" y="476919"/>
+                  </a:cubicBezTo>
+                  <a:cubicBezTo>
+                    <a:pt x="643430" y="410452"/>
+                    <a:pt x="592723" y="377219"/>
+                    <a:pt x="491309" y="377219"/>
+                  </a:cubicBezTo>
+                  <a:lnTo>
+                    <a:pt x="417305" y="377219"/>
+                  </a:lnTo>
+                  <a:lnTo>
+                    <a:pt x="417305" y="1403007"/>
+                  </a:lnTo>
+                  <a:lnTo>
+                    <a:pt x="0" y="1403007"/>
+                  </a:lnTo>
+                  <a:lnTo>
+                    <a:pt x="0" y="0"/>
+                  </a:lnTo>
+                  <a:close/>
+                </a:path>
+              </a:pathLst>
+            </a:custGeom>
+            <a:solidFill>
+              <a:srgbClr val="1181C3"/>
+            </a:solidFill>
+            <a:ln>
+              <a:noFill/>
+            </a:ln>
+            <a:effectLst/>
+          </p:spPr>
+          <p:txBody>
+            <a:bodyPr rot="0" spcFirstLastPara="0" vertOverflow="overflow" horzOverflow="overflow" vert="horz" wrap="square" lIns="91440" tIns="45720" rIns="91440" bIns="45720" numCol="1" spcCol="0" rtlCol="0" fromWordArt="0" anchor="t" anchorCtr="0" forceAA="0" compatLnSpc="1">
+              <a:prstTxWarp prst="textNoShape">
+                <a:avLst/>
+              </a:prstTxWarp>
+              <a:noAutofit/>
+            </a:bodyPr>
+            <a:lstStyle/>
+            <a:p>
+              <a:pPr algn="ctr"/>
+              <a:endParaRPr lang="es-MX" sz="16600" dirty="0">
+                <a:latin typeface="Bauhaus 93" panose="04030905020B02020C02" pitchFamily="82" charset="0"/>
+              </a:endParaRPr>
+            </a:p>
+          </p:txBody>
+        </p:sp>
+        <p:sp>
+          <p:nvSpPr>
+            <p:cNvPr id="16" name="TextBox 15">
+              <a:extLst>
+                <a:ext uri="{FF2B5EF4-FFF2-40B4-BE49-F238E27FC236}">
+                  <a16:creationId xmlns:a16="http://schemas.microsoft.com/office/drawing/2014/main" id="{AA6AB953-1F86-4146-CDBF-605672E512C2}"/>
+                </a:ext>
+              </a:extLst>
+            </p:cNvPr>
+            <p:cNvSpPr txBox="1"/>
+            <p:nvPr/>
+          </p:nvSpPr>
+          <p:spPr>
+            <a:xfrm>
+              <a:off x="5808530" y="1016179"/>
+              <a:ext cx="422091" cy="1403007"/>
+            </a:xfrm>
+            <a:custGeom>
+              <a:avLst/>
+              <a:gdLst/>
+              <a:ahLst/>
+              <a:cxnLst/>
+              <a:rect l="l" t="t" r="r" b="b"/>
+              <a:pathLst>
+                <a:path w="422091" h="1403007">
+                  <a:moveTo>
+                    <a:pt x="0" y="0"/>
+                  </a:moveTo>
+                  <a:lnTo>
+                    <a:pt x="422091" y="0"/>
+                  </a:lnTo>
+                  <a:lnTo>
+                    <a:pt x="422091" y="376191"/>
+                  </a:lnTo>
+                  <a:lnTo>
+                    <a:pt x="417305" y="376191"/>
+                  </a:lnTo>
+                  <a:lnTo>
+                    <a:pt x="417305" y="1403007"/>
+                  </a:lnTo>
+                  <a:lnTo>
+                    <a:pt x="0" y="1403007"/>
+                  </a:lnTo>
+                  <a:lnTo>
+                    <a:pt x="0" y="0"/>
+                  </a:lnTo>
+                  <a:close/>
+                </a:path>
+              </a:pathLst>
+            </a:custGeom>
+            <a:solidFill>
+              <a:srgbClr val="1181C3"/>
+            </a:solidFill>
+            <a:ln>
+              <a:noFill/>
+            </a:ln>
+            <a:effectLst/>
+          </p:spPr>
+          <p:txBody>
+            <a:bodyPr rot="0" spcFirstLastPara="0" vertOverflow="overflow" horzOverflow="overflow" vert="horz" wrap="square" lIns="91440" tIns="45720" rIns="91440" bIns="45720" numCol="1" spcCol="0" rtlCol="0" fromWordArt="0" anchor="t" anchorCtr="0" forceAA="0" compatLnSpc="1">
+              <a:prstTxWarp prst="textNoShape">
+                <a:avLst/>
+              </a:prstTxWarp>
+              <a:noAutofit/>
+            </a:bodyPr>
+            <a:lstStyle/>
+            <a:p>
+              <a:pPr algn="ctr"/>
+              <a:endParaRPr lang="es-MX" sz="16600" dirty="0">
+                <a:latin typeface="Bauhaus 93" panose="04030905020B02020C02" pitchFamily="82" charset="0"/>
+              </a:endParaRPr>
+            </a:p>
+          </p:txBody>
+        </p:sp>
+        <p:sp>
+          <p:nvSpPr>
+            <p:cNvPr id="14" name="TextBox 13">
+              <a:extLst>
+                <a:ext uri="{FF2B5EF4-FFF2-40B4-BE49-F238E27FC236}">
+                  <a16:creationId xmlns:a16="http://schemas.microsoft.com/office/drawing/2014/main" id="{B0BEA731-36DB-6FC8-2EDC-A4BA02D4DCC2}"/>
+                </a:ext>
+              </a:extLst>
+            </p:cNvPr>
+            <p:cNvSpPr txBox="1"/>
+            <p:nvPr/>
+          </p:nvSpPr>
+          <p:spPr>
+            <a:xfrm>
+              <a:off x="6230620" y="1016179"/>
+              <a:ext cx="610892" cy="1403007"/>
+            </a:xfrm>
+            <a:custGeom>
+              <a:avLst/>
+              <a:gdLst/>
+              <a:ahLst/>
+              <a:cxnLst/>
+              <a:rect l="l" t="t" r="r" b="b"/>
+              <a:pathLst>
+                <a:path w="610892" h="1403007">
+                  <a:moveTo>
+                    <a:pt x="0" y="0"/>
+                  </a:moveTo>
+                  <a:lnTo>
+                    <a:pt x="87720" y="0"/>
+                  </a:lnTo>
+                  <a:cubicBezTo>
+                    <a:pt x="389906" y="0"/>
+                    <a:pt x="540999" y="118887"/>
+                    <a:pt x="540999" y="356662"/>
+                  </a:cubicBezTo>
+                  <a:cubicBezTo>
+                    <a:pt x="540999" y="474521"/>
+                    <a:pt x="489264" y="572509"/>
+                    <a:pt x="385794" y="650625"/>
+                  </a:cubicBezTo>
+                  <a:cubicBezTo>
+                    <a:pt x="535859" y="715722"/>
+                    <a:pt x="610892" y="831868"/>
+                    <a:pt x="610892" y="999064"/>
+                  </a:cubicBezTo>
+                  <a:cubicBezTo>
+                    <a:pt x="610892" y="1127202"/>
+                    <a:pt x="566695" y="1229302"/>
+                    <a:pt x="478300" y="1305362"/>
+                  </a:cubicBezTo>
+                  <a:cubicBezTo>
+                    <a:pt x="435131" y="1341679"/>
+                    <a:pt x="388878" y="1367033"/>
+                    <a:pt x="339541" y="1381422"/>
+                  </a:cubicBezTo>
+                  <a:cubicBezTo>
+                    <a:pt x="290205" y="1395812"/>
+                    <a:pt x="223738" y="1403007"/>
+                    <a:pt x="140140" y="1403007"/>
+                  </a:cubicBezTo>
+                  <a:lnTo>
+                    <a:pt x="60996" y="1403007"/>
+                  </a:lnTo>
+                  <a:lnTo>
+                    <a:pt x="60996" y="1042234"/>
+                  </a:lnTo>
+                  <a:lnTo>
+                    <a:pt x="131917" y="1042234"/>
+                  </a:lnTo>
+                  <a:cubicBezTo>
+                    <a:pt x="173716" y="1042234"/>
+                    <a:pt x="203181" y="1036923"/>
+                    <a:pt x="220312" y="1026302"/>
+                  </a:cubicBezTo>
+                  <a:cubicBezTo>
+                    <a:pt x="237442" y="1015681"/>
+                    <a:pt x="246008" y="997009"/>
+                    <a:pt x="246008" y="970285"/>
+                  </a:cubicBezTo>
+                  <a:cubicBezTo>
+                    <a:pt x="246008" y="925060"/>
+                    <a:pt x="211061" y="902447"/>
+                    <a:pt x="141168" y="902447"/>
+                  </a:cubicBezTo>
+                  <a:lnTo>
+                    <a:pt x="60996" y="902447"/>
+                  </a:lnTo>
+                  <a:lnTo>
+                    <a:pt x="60996" y="528312"/>
+                  </a:lnTo>
+                  <a:cubicBezTo>
+                    <a:pt x="137741" y="528312"/>
+                    <a:pt x="176115" y="501930"/>
+                    <a:pt x="176115" y="449168"/>
+                  </a:cubicBezTo>
+                  <a:cubicBezTo>
+                    <a:pt x="176115" y="400516"/>
+                    <a:pt x="141510" y="376191"/>
+                    <a:pt x="72302" y="376191"/>
+                  </a:cubicBezTo>
+                  <a:lnTo>
+                    <a:pt x="0" y="376191"/>
+                  </a:lnTo>
+                  <a:lnTo>
+                    <a:pt x="0" y="0"/>
+                  </a:lnTo>
+                  <a:close/>
+                </a:path>
+              </a:pathLst>
+            </a:custGeom>
+            <a:solidFill>
+              <a:srgbClr val="ED7237"/>
+            </a:solidFill>
+            <a:ln>
+              <a:noFill/>
+            </a:ln>
+            <a:effectLst/>
+          </p:spPr>
+          <p:txBody>
+            <a:bodyPr rot="0" spcFirstLastPara="0" vertOverflow="overflow" horzOverflow="overflow" vert="horz" wrap="square" lIns="91440" tIns="45720" rIns="91440" bIns="45720" numCol="1" spcCol="0" rtlCol="0" fromWordArt="0" anchor="t" anchorCtr="0" forceAA="0" compatLnSpc="1">
+              <a:prstTxWarp prst="textNoShape">
+                <a:avLst/>
+              </a:prstTxWarp>
+              <a:noAutofit/>
+            </a:bodyPr>
+            <a:lstStyle/>
+            <a:p>
+              <a:pPr algn="ctr"/>
+              <a:endParaRPr lang="es-MX" sz="16600" dirty="0">
+                <a:latin typeface="Bauhaus 93" panose="04030905020B02020C02" pitchFamily="82" charset="0"/>
+              </a:endParaRPr>
+            </a:p>
+          </p:txBody>
+        </p:sp>
+        <p:sp>
+          <p:nvSpPr>
+            <p:cNvPr id="13" name="TextBox 12">
+              <a:extLst>
+                <a:ext uri="{FF2B5EF4-FFF2-40B4-BE49-F238E27FC236}">
+                  <a16:creationId xmlns:a16="http://schemas.microsoft.com/office/drawing/2014/main" id="{F4F49A6F-5C30-7967-9045-642E7E0B8093}"/>
+                </a:ext>
+              </a:extLst>
+            </p:cNvPr>
+            <p:cNvSpPr txBox="1"/>
+            <p:nvPr/>
+          </p:nvSpPr>
+          <p:spPr>
+            <a:xfrm>
+              <a:off x="6979900" y="1016179"/>
+              <a:ext cx="803774" cy="1403007"/>
+            </a:xfrm>
+            <a:custGeom>
+              <a:avLst/>
+              <a:gdLst/>
+              <a:ahLst/>
+              <a:cxnLst/>
+              <a:rect l="l" t="t" r="r" b="b"/>
+              <a:pathLst>
+                <a:path w="803774" h="1403007">
+                  <a:moveTo>
+                    <a:pt x="440945" y="0"/>
+                  </a:moveTo>
+                  <a:lnTo>
+                    <a:pt x="803774" y="0"/>
+                  </a:lnTo>
+                  <a:lnTo>
+                    <a:pt x="803774" y="402915"/>
+                  </a:lnTo>
+                  <a:lnTo>
+                    <a:pt x="537562" y="402915"/>
+                  </a:lnTo>
+                  <a:cubicBezTo>
+                    <a:pt x="465613" y="402915"/>
+                    <a:pt x="429638" y="426212"/>
+                    <a:pt x="429638" y="472808"/>
+                  </a:cubicBezTo>
+                  <a:cubicBezTo>
+                    <a:pt x="429638" y="500217"/>
+                    <a:pt x="438204" y="519232"/>
+                    <a:pt x="455335" y="529853"/>
+                  </a:cubicBezTo>
+                  <a:cubicBezTo>
+                    <a:pt x="472465" y="540474"/>
+                    <a:pt x="502958" y="545785"/>
+                    <a:pt x="546813" y="545785"/>
+                  </a:cubicBezTo>
+                  <a:lnTo>
+                    <a:pt x="777050" y="545785"/>
+                  </a:lnTo>
+                  <a:lnTo>
+                    <a:pt x="777050" y="858250"/>
+                  </a:lnTo>
+                  <a:lnTo>
+                    <a:pt x="504671" y="858250"/>
+                  </a:lnTo>
+                  <a:cubicBezTo>
+                    <a:pt x="467669" y="858250"/>
+                    <a:pt x="441459" y="863731"/>
+                    <a:pt x="426041" y="874695"/>
+                  </a:cubicBezTo>
+                  <a:cubicBezTo>
+                    <a:pt x="410623" y="885659"/>
+                    <a:pt x="402914" y="904160"/>
+                    <a:pt x="402914" y="930199"/>
+                  </a:cubicBezTo>
+                  <a:cubicBezTo>
+                    <a:pt x="402914" y="959664"/>
+                    <a:pt x="410794" y="979021"/>
+                    <a:pt x="426555" y="988272"/>
+                  </a:cubicBezTo>
+                  <a:cubicBezTo>
+                    <a:pt x="442315" y="997523"/>
+                    <a:pt x="474521" y="1002148"/>
+                    <a:pt x="523172" y="1002148"/>
+                  </a:cubicBezTo>
+                  <a:lnTo>
+                    <a:pt x="803774" y="1002148"/>
+                  </a:lnTo>
+                  <a:lnTo>
+                    <a:pt x="803774" y="1403007"/>
+                  </a:lnTo>
+                  <a:lnTo>
+                    <a:pt x="475891" y="1403007"/>
+                  </a:lnTo>
+                  <a:cubicBezTo>
+                    <a:pt x="321715" y="1403007"/>
+                    <a:pt x="203855" y="1366176"/>
+                    <a:pt x="122313" y="1292514"/>
+                  </a:cubicBezTo>
+                  <a:cubicBezTo>
+                    <a:pt x="40770" y="1218852"/>
+                    <a:pt x="0" y="1112470"/>
+                    <a:pt x="0" y="973368"/>
+                  </a:cubicBezTo>
+                  <a:lnTo>
+                    <a:pt x="0" y="423472"/>
+                  </a:lnTo>
+                  <a:cubicBezTo>
+                    <a:pt x="0" y="289167"/>
+                    <a:pt x="38544" y="185012"/>
+                    <a:pt x="115632" y="111007"/>
+                  </a:cubicBezTo>
+                  <a:cubicBezTo>
+                    <a:pt x="192720" y="37002"/>
+                    <a:pt x="301158" y="0"/>
+                    <a:pt x="440945" y="0"/>
+                  </a:cubicBezTo>
+                  <a:close/>
+                </a:path>
+              </a:pathLst>
+            </a:custGeom>
+            <a:solidFill>
+              <a:srgbClr val="ED7237"/>
+            </a:solidFill>
+            <a:ln>
+              <a:noFill/>
+            </a:ln>
+            <a:effectLst/>
+          </p:spPr>
+          <p:txBody>
+            <a:bodyPr rot="0" spcFirstLastPara="0" vertOverflow="overflow" horzOverflow="overflow" vert="horz" wrap="square" lIns="91440" tIns="45720" rIns="91440" bIns="45720" numCol="1" spcCol="0" rtlCol="0" fromWordArt="0" anchor="t" anchorCtr="0" forceAA="0" compatLnSpc="1">
+              <a:prstTxWarp prst="textNoShape">
+                <a:avLst/>
+              </a:prstTxWarp>
+              <a:noAutofit/>
+            </a:bodyPr>
+            <a:lstStyle/>
+            <a:p>
+              <a:pPr algn="ctr"/>
+              <a:endParaRPr lang="es-MX" sz="16600" dirty="0">
+                <a:latin typeface="Bauhaus 93" panose="04030905020B02020C02" pitchFamily="82" charset="0"/>
+              </a:endParaRPr>
+            </a:p>
+          </p:txBody>
+        </p:sp>
+        <p:sp>
+          <p:nvSpPr>
+            <p:cNvPr id="25" name="Rectangle 24">
+              <a:extLst>
+                <a:ext uri="{FF2B5EF4-FFF2-40B4-BE49-F238E27FC236}">
+                  <a16:creationId xmlns:a16="http://schemas.microsoft.com/office/drawing/2014/main" id="{1C7193A3-6806-BC7B-4A16-58204B6C1903}"/>
+                </a:ext>
+              </a:extLst>
+            </p:cNvPr>
+            <p:cNvSpPr/>
+            <p:nvPr/>
+          </p:nvSpPr>
+          <p:spPr>
+            <a:xfrm flipH="1">
+              <a:off x="6223987" y="1016179"/>
+              <a:ext cx="68228" cy="1403007"/>
+            </a:xfrm>
+            <a:prstGeom prst="rect">
+              <a:avLst/>
+            </a:prstGeom>
+            <a:solidFill>
+              <a:schemeClr val="bg1"/>
+            </a:solidFill>
+            <a:ln>
+              <a:noFill/>
+            </a:ln>
+          </p:spPr>
+          <p:style>
+            <a:lnRef idx="2">
+              <a:schemeClr val="accent1">
+                <a:shade val="15000"/>
+              </a:schemeClr>
+            </a:lnRef>
+            <a:fillRef idx="1">
+              <a:schemeClr val="accent1"/>
+            </a:fillRef>
+            <a:effectRef idx="0">
+              <a:schemeClr val="accent1"/>
+            </a:effectRef>
+            <a:fontRef idx="minor">
+              <a:schemeClr val="lt1"/>
+            </a:fontRef>
+          </p:style>
+          <p:txBody>
+            <a:bodyPr rtlCol="0" anchor="ctr"/>
+            <a:lstStyle/>
+            <a:p>
+              <a:pPr algn="ctr"/>
+              <a:endParaRPr lang="es-MX" dirty="0"/>
+            </a:p>
+          </p:txBody>
+        </p:sp>
+      </p:grpSp>
+      <p:sp>
+        <p:nvSpPr>
+          <p:cNvPr id="27" name="TextBox 26">
+            <a:extLst>
+              <a:ext uri="{FF2B5EF4-FFF2-40B4-BE49-F238E27FC236}">
+                <a16:creationId xmlns:a16="http://schemas.microsoft.com/office/drawing/2014/main" id="{65C9398F-EF39-83C3-048F-5344E51D6E5F}"/>
+              </a:ext>
+            </a:extLst>
+          </p:cNvPr>
+          <p:cNvSpPr txBox="1"/>
+          <p:nvPr/>
+        </p:nvSpPr>
+        <p:spPr>
+          <a:xfrm>
+            <a:off x="4704080" y="4072795"/>
+            <a:ext cx="2783840" cy="584775"/>
+          </a:xfrm>
+          <a:prstGeom prst="rect">
+            <a:avLst/>
+          </a:prstGeom>
+          <a:noFill/>
+        </p:spPr>
+        <p:txBody>
+          <a:bodyPr wrap="square" rtlCol="0">
+            <a:spAutoFit/>
+          </a:bodyPr>
+          <a:lstStyle/>
+          <a:p>
+            <a:pPr algn="ctr"/>
+            <a:r>
+              <a:rPr lang="en-US" sz="3200" dirty="0">
+                <a:ln w="12700">
+                  <a:solidFill>
+                    <a:srgbClr val="ED7237"/>
+                  </a:solidFill>
+                </a:ln>
+                <a:solidFill>
+                  <a:srgbClr val="ED7237"/>
+                </a:solidFill>
+                <a:latin typeface="Bahnschrift SemiBold Condensed" panose="020B0502040204020203" pitchFamily="34" charset="0"/>
+                <a:cs typeface="Aharoni" panose="02010803020104030203" pitchFamily="2" charset="-79"/>
+              </a:rPr>
+              <a:t>Rutas Baja Express</a:t>
+            </a:r>
+            <a:endParaRPr lang="es-MX" sz="3200" dirty="0">
+              <a:ln w="12700">
+                <a:solidFill>
+                  <a:srgbClr val="ED7237"/>
+                </a:solidFill>
+              </a:ln>
+              <a:solidFill>
+                <a:srgbClr val="ED7237"/>
+              </a:solidFill>
+              <a:latin typeface="Bahnschrift SemiBold Condensed" panose="020B0502040204020203" pitchFamily="34" charset="0"/>
+              <a:cs typeface="Aharoni" panose="02010803020104030203" pitchFamily="2" charset="-79"/>
+            </a:endParaRPr>
+          </a:p>
+        </p:txBody>
+      </p:sp>
     </p:spTree>
     <p:extLst>
       <p:ext uri="{BB962C8B-B14F-4D97-AF65-F5344CB8AC3E}">
-        <p14:creationId xmlns:p14="http://schemas.microsoft.com/office/powerpoint/2010/main" val="1007135045"/>
+        <p14:creationId xmlns:p14="http://schemas.microsoft.com/office/powerpoint/2010/main" val="3654382632"/>
       </p:ext>
     </p:extLst>
   </p:cSld>
